--- a/제출_20260901/기획안_요약.pptx
+++ b/제출_20260901/기획안_요약.pptx
@@ -773,7 +773,7 @@
           <a:p>
             <a:r>
               <a:rPr lang="en-US" dirty="0"/>
-              <a:t>AWS 2개 가용영역이 상시 서비스면입니다. 왼쪽 아래 번호가 요청 흐름이고, 오른쪽 온프레미스 IDC 가 증명면입니다. 관리형 경로에서는 커널에 손을 댈 수 없어서 장애 주입은 전부 IDC 쪽에서 합니다. 붉은 점선 박스가 주입 지점이고 실험 창에만 띄웁니다.</a:t>
+              <a:t>가운데 굵은 가로선이 쓰기 경로입니다. 정거장 여섯 개를 왼쪽에서 오른쪽으로 읽으면 접수, 저널 append, ACK, 매칭엔진, 원장 정산, 프로젝션입니다. 200 을 내는 지점이 세 번째라는 것이 이 설계의 요지입니다. 디스크에 남기고 나서 응답하므로 그 뒤에 무엇이 죽어도 재생할 수 있습니다. 옅게 채운 상자가 PostgreSQL 에 남는 것, 흰 상자가 메모리에서 도는 것, 파선이 재계산 가능한 파생입니다. 색을 쓰지 않고 형태로만 갈랐습니다. 굵은 테두리를 두른 매칭엔진이 이중화할 수 없는 유일점입니다. 위 칸이 가용영역 a 이고 아래 점선 칸이 c 입니다. app-1 과 app-2 를 같은 x 에 두었기 때문에 같은 자리가 다른 가용영역에서 다시 선다는 것이 배치로 읽힙니다. ALB 는 앱이 내는 readiness 503 을 그대로 읽습니다. 팔로워가 스스로 빠지므로 헬스체크를 자작하지 않았고 판정 주체는 여전히 앱입니다. 맨 아래 점선 띠가 온프레미스 검증면입니다. tc netem 과 nftables 같은 커널 계층 주입은 이 평면 전용입니다. 클라우드 노드에 걸면 SSM 접근 경로가 같은 네트워크를 타서 노드를 통째로 잃습니다. 두 평면을 잇는 것은 상시 터널이 아니라 같은 GHCR digest 와 저장소에 커밋한 verdict 파일입니다.</a:t>
             </a:r>
             <a:endParaRPr lang="en-US" dirty="0"/>
           </a:p>
@@ -861,7 +861,7 @@
           <a:p>
             <a:r>
               <a:rPr lang="en-US" dirty="0"/>
-              <a:t>학교 필수 조건이 외부에서 접속 가능한 상태로 서비스하는 것입니다. 그런데 이 프로젝트의 핵심 실험은 커널에 장애를 주입하는 것이라, 상시 서비스와 파괴 실험이 한 평면에서는 양립하지 않습니다. 그래서 평면을 나눴습니다. 관리형 DB를 쓰지 않은 것도 같은 이유입니다. 주입 권한이 없으면 증명 자체가 성립하지 않습니다.</a:t>
+              <a:t>학교 필수 조건이 외부에서 접속 가능한 상태로 서비스하는 것입니다. 그런데 이 프로젝트의 핵심 실험은 커널에 장애를 주입하는 것이라 한 평면에서는 양립하지 않습니다. 그래서 세 평면으로 나눴습니다. 상시면은 두 가용영역에 이중화한 채로 24시간 서고, 증명면은 부하 창에만 뜨는 발생기 한 대이며, 검증면은 집 PC 의 온프레미스라 비용이 0입니다. 로드밸런서는 ALB 를 채택했습니다. 자작 헬스체크를 없애려고 관리형을 쓴 것이 아니라 앱이 이미 내고 있는 readiness 계약을 그대로 소비시킨 것이라 판정 주체는 여전히 앱입니다. 관리형 DB를 안 쓴 것은 반대 방향의 판단입니다. 복제 링크에 tc netem 을 걸 수 없으면 증명 두 번째 명제가 성립하지 않습니다.</a:t>
             </a:r>
             <a:endParaRPr lang="en-US" dirty="0"/>
           </a:p>
@@ -949,7 +949,7 @@
           <a:p>
             <a:r>
               <a:rPr lang="en-US" dirty="0"/>
-              <a:t>운영과 보안은 설정했다는 말로는 증거가 되지 않습니다. DB 롤을 분리한 뒤 실제로 42501 권한 거부가 나오는 것, 원장에 직접 UPDATE를 시도했을 때 P0001로 막히는 것을 캡처로 남깁니다. 비용은 결과가 아니라 설계 변수로 다뤘습니다. 상한을 먼저 정하고 그 안에 들어오는 토폴로지를 골랐습니다.</a:t>
+              <a:t>운영과 보안은 설정했다는 말로는 증거가 되지 않습니다. DB 롤을 분리한 뒤 실제로 42501 권한 거부가 나오는 것, 원장에 직접 UPDATE 를 시도했을 때 P0001 로 막히는 것을 캡처로 남깁니다. 비용은 결과가 아니라 설계 변수로 다뤘습니다. 상한을 먼저 정하고 그 안에 들어오는 토폴로지를 골랐습니다. 판정면도 바꿨습니다. 730시간 런레이트는 이 구조가 한 번도 실현하지 않는 값이라 달력 월 실청구로 판정합니다. 구월과 시월이 각각 97,318원이고 여유가 2,682원뿐입니다. 그 여유가 환율의 함수라서 부하 발생기 시간을 환율별 가용치 표로 정의해 두었습니다. 크레딧이 남아 있어 실제 현금 지출은 0이지만 상한을 현금 기준으로 완화하지 않았습니다. 완화하면 RDS 대신 자체 복제를 고른 근거가 함께 사라집니다.</a:t>
             </a:r>
             <a:endParaRPr lang="en-US" dirty="0"/>
           </a:p>
@@ -1037,7 +1037,7 @@
           <a:p>
             <a:r>
               <a:rPr lang="en-US" dirty="0"/>
-              <a:t>실험 9종이 이미 배선돼 있고 라이브 통과가 5건입니다. 다만 지금까지의 네트워크 실험은 프록시 레벨 모사이지 커널 주입이 아닙니다. 그래서 tc netem으로 실제 커널에 지연과 손실을 넣는 E10을 새로 추가합니다. 판정은 주입 전후로 권위 검증을 한 번씩 돌려 대조하는 방식입니다.</a:t>
+              <a:t>실험 열 종입니다. 왼쪽이 무엇을 확인하는 실험인지, 오른쪽이 실제로 나온 결과입니다. 라이브 통과가 여섯 건이고 그중 E5와 E7은 불변식 스물세 개가 전건 0위반이었습니다. 복구됐다는 사실과 데이터가 맞다는 사실을 같은 실행 안에서 함께 판정했다는 뜻입니다. 빨간 두 줄이 남은 일입니다. E4는 리더 킬인데 측정 기준이 8월 18일에 바뀐 뒤 재측정을 안 했습니다. 옛 숫자를 그대로 쓰면 거짓이 되므로 이 계획서에 수치로 적지 않았습니다. E10은 지금까지와 층위가 다릅니다. E1부터 E9까지는 전부 프록시가 느린 척 끊긴 척한 모사이고, tc netem 은 리눅스 커널 큐에 직접 지연과 손실을 넣습니다. 그게 실제 네트워크 장애와 같은 층위입니다.</a:t>
             </a:r>
             <a:endParaRPr lang="en-US" dirty="0"/>
           </a:p>
@@ -1125,7 +1125,7 @@
           <a:p>
             <a:r>
               <a:rPr lang="en-US" dirty="0"/>
-              <a:t>전체 53일, 순 가용 336시간입니다. 계획에 186시간을 쓰고 60시간을 예비로 남겼습니다. 이 저장소는 환경 마찰로 며칠씩 날린 전례가 다섯 건 문서로 남아 있어서 슬랙 없는 계획은 실패합니다. 고정점 네 개는 침범하지 않고, 밀리면 미리 정한 순서대로 자릅니다.</a:t>
+              <a:t>전체 48일, 순 가용 303시간입니다. 계획에 186시간을 쓰고 60시간을 예비로 남겼습니다. 이 저장소는 환경 마찰로 며칠씩 날린 전례가 다섯 건 문서로 남아 있어서 슬랙 없는 계획은 실패합니다. 고정점 네 개는 침범하지 않고, 밀리면 미리 정한 순서대로 자릅니다.</a:t>
             </a:r>
             <a:endParaRPr lang="en-US" dirty="0"/>
           </a:p>
@@ -5802,7 +5802,7 @@
       </p:sp>
       <p:pic>
         <p:nvPicPr>
-          <p:cNvPr id="5" name="Image 0" descr="arch_aws_slide.png">    </p:cNvPr>
+          <p:cNvPr id="5" name="Image 0" descr="시스템_아키텍처_슬라이드용.png">    </p:cNvPr>
           <p:cNvPicPr>
             <a:picLocks noChangeAspect="1"/>
           </p:cNvPicPr>
@@ -6231,7 +6231,7 @@
                 <a:ea typeface="맑은 고딕" pitchFamily="34" charset="-122"/>
                 <a:cs typeface="맑은 고딕" pitchFamily="34" charset="-120"/>
               </a:rPr>
-              <a:t>S3 · 정적 66페이지</a:t>
+              <a:t>S3 · 정적 오리진</a:t>
             </a:r>
             <a:endParaRPr lang="en-US" sz="1050" dirty="0"/>
           </a:p>
@@ -6363,7 +6363,7 @@
                 <a:ea typeface="맑은 고딕" pitchFamily="34" charset="-122"/>
                 <a:cs typeface="맑은 고딕" pitchFamily="34" charset="-120"/>
               </a:rPr>
-              <a:t>edge · nginx TLS · nftables</a:t>
+              <a:t>ALB · 동적 오리진 · 2 AZ</a:t>
             </a:r>
             <a:endParaRPr lang="en-US" sz="1050" dirty="0"/>
           </a:p>
@@ -6429,7 +6429,7 @@
                 <a:ea typeface="맑은 고딕" pitchFamily="34" charset="-122"/>
                 <a:cs typeface="맑은 고딕" pitchFamily="34" charset="-120"/>
               </a:rPr>
-              <a:t>core · app · PostgreSQL · 관측</a:t>
+              <a:t>app x2 · PostgreSQL primary/standby</a:t>
             </a:r>
             <a:endParaRPr lang="en-US" sz="1050" dirty="0"/>
           </a:p>
@@ -6543,7 +6543,7 @@
                 <a:ea typeface="맑은 고딕" pitchFamily="34" charset="-122"/>
                 <a:cs typeface="맑은 고딕" pitchFamily="34" charset="-120"/>
               </a:rPr>
-              <a:t>증명면  실험 창에만 구동 후 파기</a:t>
+              <a:t>증명면  부하 창에만 구동 후 파기</a:t>
             </a:r>
             <a:endParaRPr lang="en-US" sz="1250" dirty="0"/>
           </a:p>
@@ -6582,7 +6582,7 @@
                 <a:ea typeface="맑은 고딕" pitchFamily="34" charset="-122"/>
                 <a:cs typeface="맑은 고딕" pitchFamily="34" charset="-120"/>
               </a:rPr>
-              <a:t>app-2  ·  pg-standby  ·  obs  ·  load   =  65시간 · 20,530원</a:t>
+              <a:t>load c7g.large 단독   =  달력 월 45시간 예산 · USD 0.0816 /hr. app-2 와 pg-standby 는 상시면으로 올라갔다</a:t>
             </a:r>
             <a:endParaRPr lang="en-US" sz="1150" dirty="0"/>
           </a:p>
@@ -6628,7 +6628,7 @@
                 <a:ea typeface="맑은 고딕" pitchFamily="34" charset="-122"/>
                 <a:cs typeface="맑은 고딕" pitchFamily="34" charset="-120"/>
               </a:rPr>
-              <a:t>RDS 비채택. 커널 주입 권한이 없으면 증명 밖으로 나간다</a:t>
+              <a:t>ALB 채택. 앱의 readiness 503 을 그대로 읽어 팔로워가 스스로 빠진다</a:t>
             </a:r>
             <a:endParaRPr lang="en-US" sz="1250" dirty="0"/>
           </a:p>
@@ -6652,7 +6652,7 @@
                 <a:ea typeface="맑은 고딕" pitchFamily="34" charset="-122"/>
                 <a:cs typeface="맑은 고딕" pitchFamily="34" charset="-120"/>
               </a:rPr>
-              <a:t>Rocky 10은 iptables 제거. nftables · SELinux enforcing</a:t>
+              <a:t>RDS 비채택. 복제 링크에 주입할 권한이 없으면 증명 밖으로 나간다</a:t>
             </a:r>
             <a:endParaRPr lang="en-US" sz="1250" dirty="0"/>
           </a:p>
@@ -6676,7 +6676,7 @@
                 <a:ea typeface="맑은 고딕" pitchFamily="34" charset="-122"/>
                 <a:cs typeface="맑은 고딕" pitchFamily="34" charset="-120"/>
               </a:rPr>
-              <a:t>SSH 미개방. SSM 세션으로만 접속</a:t>
+              <a:t>SSH 미개방. SSM 세션 단독. 커널 주입은 온프레미스 검증면 전용</a:t>
             </a:r>
             <a:endParaRPr lang="en-US" sz="1250" dirty="0"/>
           </a:p>
@@ -7009,7 +7009,7 @@
                 <a:ea typeface="맑은 고딕" pitchFamily="34" charset="-122"/>
                 <a:cs typeface="맑은 고딕" pitchFamily="34" charset="-120"/>
               </a:rPr>
-              <a:t>로그 중앙화</a:t>
+              <a:t>로그 중앙화는 W5 이월</a:t>
             </a:r>
             <a:endParaRPr lang="en-US" sz="1100" dirty="0"/>
           </a:p>
@@ -7329,7 +7329,7 @@
                 <a:ea typeface="맑은 고딕" pitchFamily="34" charset="-122"/>
                 <a:cs typeface="맑은 고딕" pitchFamily="34" charset="-120"/>
               </a:rPr>
-              <a:t>계획값 92,425원</a:t>
+              <a:t>달력 월 실청구 97,318원</a:t>
             </a:r>
             <a:endParaRPr lang="en-US" sz="1100" dirty="0"/>
           </a:p>
@@ -7353,7 +7353,7 @@
                 <a:ea typeface="맑은 고딕" pitchFamily="34" charset="-122"/>
                 <a:cs typeface="맑은 고딕" pitchFamily="34" charset="-120"/>
               </a:rPr>
-              <a:t>6주 총계 139,854원</a:t>
+              <a:t>발표까지 총계 USD 139.03</a:t>
             </a:r>
             <a:endParaRPr lang="en-US" sz="1100" dirty="0"/>
           </a:p>
@@ -7377,7 +7377,7 @@
                 <a:ea typeface="맑은 고딕" pitchFamily="34" charset="-122"/>
                 <a:cs typeface="맑은 고딕" pitchFamily="34" charset="-120"/>
               </a:rPr>
-              <a:t>감축 순서 1~4 사전 확정</a:t>
+              <a:t>감축 순서 1~5 사전 확정</a:t>
             </a:r>
             <a:endParaRPr lang="en-US" sz="1100" dirty="0"/>
           </a:p>
@@ -7407,8 +7407,8 @@
               <a:tblPr/>
               <a:tblGrid>
                 <a:gridCol w="4206240"/>
-                <a:gridCol w="3291840"/>
-                <a:gridCol w="3566160"/>
+                <a:gridCol w="2194560"/>
+                <a:gridCol w="4663440"/>
               </a:tblGrid>
               <a:tr h="310896">
                 <a:tc>
@@ -7496,7 +7496,7 @@
                           <a:ea typeface="맑은 고딕" pitchFamily="34" charset="-122"/>
                           <a:cs typeface="맑은 고딕" pitchFamily="34" charset="-120"/>
                         </a:rPr>
-                        <a:t>6주 총계</a:t>
+                        <a:t>금액 USD</a:t>
                       </a:r>
                       <a:endParaRPr lang="en-US" sz="1100" dirty="0">
                         <a:latin typeface="맑은 고딕" charset="0"/>
@@ -7634,7 +7634,7 @@
                           <a:ea typeface="맑은 고딕" pitchFamily="34" charset="-122"/>
                           <a:cs typeface="맑은 고딕" pitchFamily="34" charset="-120"/>
                         </a:rPr>
-                        <a:t>상시면 EC2 · EBS · IP</a:t>
+                        <a:t>S0 baseline  09-01 ~ 09-14</a:t>
                       </a:r>
                       <a:endParaRPr lang="en-US" sz="1100" dirty="0">
                         <a:latin typeface="맑은 고딕" charset="0"/>
@@ -7699,7 +7699,7 @@
                           <a:ea typeface="맑은 고딕" pitchFamily="34" charset="-122"/>
                           <a:cs typeface="맑은 고딕" pitchFamily="34" charset="-120"/>
                         </a:rPr>
-                        <a:t>95,827원</a:t>
+                        <a:t>0.72</a:t>
                       </a:r>
                       <a:endParaRPr lang="en-US" sz="1100" dirty="0">
                         <a:latin typeface="맑은 고딕" charset="0"/>
@@ -7764,7 +7764,7 @@
                           <a:ea typeface="맑은 고딕" pitchFamily="34" charset="-122"/>
                           <a:cs typeface="맑은 고딕" pitchFamily="34" charset="-120"/>
                         </a:rPr>
-                        <a:t>24시간 구동</a:t>
+                        <a:t>Route 53 · CloudFront · S3</a:t>
                       </a:r>
                       <a:endParaRPr lang="en-US" sz="1100" dirty="0">
                         <a:latin typeface="맑은 고딕" charset="0"/>
@@ -7831,7 +7831,7 @@
                           <a:ea typeface="맑은 고딕" pitchFamily="34" charset="-122"/>
                           <a:cs typeface="맑은 고딕" pitchFamily="34" charset="-120"/>
                         </a:rPr>
-                        <a:t>증명면 65시간</a:t>
+                        <a:t>S1 HA steady  09-15 ~ 10-16</a:t>
                       </a:r>
                       <a:endParaRPr lang="en-US" sz="1100" dirty="0">
                         <a:latin typeface="맑은 고딕" charset="0"/>
@@ -7896,7 +7896,7 @@
                           <a:ea typeface="맑은 고딕" pitchFamily="34" charset="-122"/>
                           <a:cs typeface="맑은 고딕" pitchFamily="34" charset="-120"/>
                         </a:rPr>
-                        <a:t>20,530원</a:t>
+                        <a:t>117.87</a:t>
                       </a:r>
                       <a:endParaRPr lang="en-US" sz="1100" dirty="0">
                         <a:latin typeface="맑은 고딕" charset="0"/>
@@ -7961,7 +7961,7 @@
                           <a:ea typeface="맑은 고딕" pitchFamily="34" charset="-122"/>
                           <a:cs typeface="맑은 고딕" pitchFamily="34" charset="-120"/>
                         </a:rPr>
-                        <a:t>창 구동 후 파기</a:t>
+                        <a:t>app x2 · primary/standby · NAT x2</a:t>
                       </a:r>
                       <a:endParaRPr lang="en-US" sz="1100" dirty="0">
                         <a:latin typeface="맑은 고딕" charset="0"/>
@@ -8028,7 +8028,7 @@
                           <a:ea typeface="맑은 고딕" pitchFamily="34" charset="-122"/>
                           <a:cs typeface="맑은 고딕" pitchFamily="34" charset="-120"/>
                         </a:rPr>
-                        <a:t>도메인 · 정적 · 아웃바운드</a:t>
+                        <a:t>S2 부하 창  90시간</a:t>
                       </a:r>
                       <a:endParaRPr lang="en-US" sz="1100" dirty="0">
                         <a:latin typeface="맑은 고딕" charset="0"/>
@@ -8093,7 +8093,7 @@
                           <a:ea typeface="맑은 고딕" pitchFamily="34" charset="-122"/>
                           <a:cs typeface="맑은 고딕" pitchFamily="34" charset="-120"/>
                         </a:rPr>
-                        <a:t>6,864원</a:t>
+                        <a:t>7.79</a:t>
                       </a:r>
                       <a:endParaRPr lang="en-US" sz="1100" dirty="0">
                         <a:latin typeface="맑은 고딕" charset="0"/>
@@ -8158,7 +8158,7 @@
                           <a:ea typeface="맑은 고딕" pitchFamily="34" charset="-122"/>
                           <a:cs typeface="맑은 고딕" pitchFamily="34" charset="-120"/>
                         </a:rPr>
-                        <a:t>CloudFront 프리티어</a:t>
+                        <a:t>달력 월 45시간 예산</a:t>
                       </a:r>
                       <a:endParaRPr lang="en-US" sz="1100" dirty="0">
                         <a:latin typeface="맑은 고딕" charset="0"/>
@@ -8290,7 +8290,7 @@
                           <a:ea typeface="맑은 고딕" pitchFamily="34" charset="-122"/>
                           <a:cs typeface="맑은 고딕" pitchFamily="34" charset="-120"/>
                         </a:rPr>
-                        <a:t>139,854원</a:t>
+                        <a:t>139.03</a:t>
                       </a:r>
                       <a:endParaRPr lang="en-US" sz="1100" dirty="0">
                         <a:latin typeface="맑은 고딕" charset="0"/>
@@ -8355,7 +8355,7 @@
                           <a:ea typeface="맑은 고딕" pitchFamily="34" charset="-122"/>
                           <a:cs typeface="맑은 고딕" pitchFamily="34" charset="-120"/>
                         </a:rPr>
-                        <a:t>월 환산 92,425원</a:t>
+                        <a:t>달력 월 97,318원 · 상한 100,000원 안</a:t>
                       </a:r>
                       <a:endParaRPr lang="en-US" sz="1100" dirty="0">
                         <a:latin typeface="맑은 고딕" charset="0"/>
@@ -8590,1778 +8590,2229 @@
                 <a:ea typeface="맑은 고딕" pitchFamily="34" charset="-122"/>
                 <a:cs typeface="맑은 고딕" pitchFamily="34" charset="-120"/>
               </a:rPr>
-              <a:t>지금까지의 네트워크 실험은 전부 프록시 모사이고 커널 주입이 아니다</a:t>
+              <a:t>장애를 일부러 내고 데이터가 맞는지 확인한다. 예상과 실측을 같은 행에서 대조한다</a:t>
             </a:r>
             <a:endParaRPr lang="en-US" sz="1450" dirty="0"/>
           </a:p>
         </p:txBody>
       </p:sp>
-      <p:sp>
-        <p:nvSpPr>
-          <p:cNvPr id="5" name="Shape 3"/>
+      <p:graphicFrame>
+        <p:nvGraphicFramePr>
+          <p:cNvPr id="8" name="Table 0"/>
+          <p:cNvGraphicFramePr>
+            <a:graphicFrameLocks noGrp="1"/>
+          </p:cNvGraphicFramePr>
+          <p:nvPr>
+            <p:extLst>
+              <p:ext uri="{D42A27DB-BD31-4B8C-83A1-F6EECF244321}">
+                <p14:modId xmlns:p14="http://schemas.microsoft.com/office/powerpoint/2010/main" val="1579011935"/>
+              </p:ext>
+            </p:extLst>
+          </p:nvPr>
+        </p:nvGraphicFramePr>
+        <p:xfrm>
+          <a:off x="566928" y="1481328"/>
+          <a:ext cx="11057839" cy="914400"/>
+        </p:xfrm>
+        <a:graphic>
+          <a:graphicData uri="http://schemas.openxmlformats.org/drawingml/2006/table">
+            <a:tbl>
+              <a:tblPr/>
+              <a:tblGrid>
+                <a:gridCol w="713232"/>
+                <a:gridCol w="6903720"/>
+                <a:gridCol w="3438144"/>
+              </a:tblGrid>
+              <a:tr h="301752">
+                <a:tc>
+                  <a:txBody>
+                    <a:bodyPr/>
+                    <a:lstStyle/>
+                    <a:p>
+                      <a:pPr indent="0" marL="0">
+                        <a:buNone/>
+                      </a:pPr>
+                      <a:r>
+                        <a:rPr lang="en-US" sz="1050" b="1" dirty="0">
+                          <a:solidFill>
+                            <a:srgbClr val="FFFFFF"/>
+                          </a:solidFill>
+                          <a:latin typeface="맑은 고딕" pitchFamily="34" charset="0"/>
+                          <a:ea typeface="맑은 고딕" pitchFamily="34" charset="-122"/>
+                          <a:cs typeface="맑은 고딕" pitchFamily="34" charset="-120"/>
+                        </a:rPr>
+                        <a:t>항목</a:t>
+                      </a:r>
+                      <a:endParaRPr lang="en-US" sz="1050" dirty="0">
+                        <a:latin typeface="맑은 고딕" charset="0"/>
+                        <a:ea typeface="맑은 고딕" charset="0"/>
+                        <a:cs typeface="맑은 고딕" charset="0"/>
+                      </a:endParaRPr>
+                    </a:p>
+                  </a:txBody>
+                  <a:tcPr marL="88900" marR="88900" marT="38100" marB="38100" anchor="ctr">
+                    <a:lnL w="6350" cap="flat" cmpd="sng" algn="ctr">
+                      <a:solidFill>
+                        <a:srgbClr val="D8DEE2"/>
+                      </a:solidFill>
+                      <a:prstDash val="solid"/>
+                      <a:round/>
+                      <a:headEnd type="none" w="med" len="med"/>
+                      <a:tailEnd type="none" w="med" len="med"/>
+                    </a:lnL>
+                    <a:lnR w="6350" cap="flat" cmpd="sng" algn="ctr">
+                      <a:solidFill>
+                        <a:srgbClr val="D8DEE2"/>
+                      </a:solidFill>
+                      <a:prstDash val="solid"/>
+                      <a:round/>
+                      <a:headEnd type="none" w="med" len="med"/>
+                      <a:tailEnd type="none" w="med" len="med"/>
+                    </a:lnR>
+                    <a:lnT w="6350" cap="flat" cmpd="sng" algn="ctr">
+                      <a:solidFill>
+                        <a:srgbClr val="D8DEE2"/>
+                      </a:solidFill>
+                      <a:prstDash val="solid"/>
+                      <a:round/>
+                      <a:headEnd type="none" w="med" len="med"/>
+                      <a:tailEnd type="none" w="med" len="med"/>
+                    </a:lnT>
+                    <a:lnB w="6350" cap="flat" cmpd="sng" algn="ctr">
+                      <a:solidFill>
+                        <a:srgbClr val="D8DEE2"/>
+                      </a:solidFill>
+                      <a:prstDash val="solid"/>
+                      <a:round/>
+                      <a:headEnd type="none" w="med" len="med"/>
+                      <a:tailEnd type="none" w="med" len="med"/>
+                    </a:lnB>
+                    <a:solidFill>
+                      <a:srgbClr val="222E35"/>
+                    </a:solidFill>
+                  </a:tcPr>
+                </a:tc>
+                <a:tc>
+                  <a:txBody>
+                    <a:bodyPr/>
+                    <a:lstStyle/>
+                    <a:p>
+                      <a:pPr indent="0" marL="0">
+                        <a:buNone/>
+                      </a:pPr>
+                      <a:r>
+                        <a:rPr lang="en-US" sz="1050" b="1" dirty="0">
+                          <a:solidFill>
+                            <a:srgbClr val="FFFFFF"/>
+                          </a:solidFill>
+                          <a:latin typeface="맑은 고딕" pitchFamily="34" charset="0"/>
+                          <a:ea typeface="맑은 고딕" pitchFamily="34" charset="-122"/>
+                          <a:cs typeface="맑은 고딕" pitchFamily="34" charset="-120"/>
+                        </a:rPr>
+                        <a:t>한 줄 요약</a:t>
+                      </a:r>
+                      <a:endParaRPr lang="en-US" sz="1050" dirty="0">
+                        <a:latin typeface="맑은 고딕" charset="0"/>
+                        <a:ea typeface="맑은 고딕" charset="0"/>
+                        <a:cs typeface="맑은 고딕" charset="0"/>
+                      </a:endParaRPr>
+                    </a:p>
+                  </a:txBody>
+                  <a:tcPr marL="88900" marR="88900" marT="38100" marB="38100" anchor="ctr">
+                    <a:lnL w="6350" cap="flat" cmpd="sng" algn="ctr">
+                      <a:solidFill>
+                        <a:srgbClr val="D8DEE2"/>
+                      </a:solidFill>
+                      <a:prstDash val="solid"/>
+                      <a:round/>
+                      <a:headEnd type="none" w="med" len="med"/>
+                      <a:tailEnd type="none" w="med" len="med"/>
+                    </a:lnL>
+                    <a:lnR w="6350" cap="flat" cmpd="sng" algn="ctr">
+                      <a:solidFill>
+                        <a:srgbClr val="D8DEE2"/>
+                      </a:solidFill>
+                      <a:prstDash val="solid"/>
+                      <a:round/>
+                      <a:headEnd type="none" w="med" len="med"/>
+                      <a:tailEnd type="none" w="med" len="med"/>
+                    </a:lnR>
+                    <a:lnT w="6350" cap="flat" cmpd="sng" algn="ctr">
+                      <a:solidFill>
+                        <a:srgbClr val="D8DEE2"/>
+                      </a:solidFill>
+                      <a:prstDash val="solid"/>
+                      <a:round/>
+                      <a:headEnd type="none" w="med" len="med"/>
+                      <a:tailEnd type="none" w="med" len="med"/>
+                    </a:lnT>
+                    <a:lnB w="6350" cap="flat" cmpd="sng" algn="ctr">
+                      <a:solidFill>
+                        <a:srgbClr val="D8DEE2"/>
+                      </a:solidFill>
+                      <a:prstDash val="solid"/>
+                      <a:round/>
+                      <a:headEnd type="none" w="med" len="med"/>
+                      <a:tailEnd type="none" w="med" len="med"/>
+                    </a:lnB>
+                    <a:solidFill>
+                      <a:srgbClr val="222E35"/>
+                    </a:solidFill>
+                  </a:tcPr>
+                </a:tc>
+                <a:tc>
+                  <a:txBody>
+                    <a:bodyPr/>
+                    <a:lstStyle/>
+                    <a:p>
+                      <a:pPr indent="0" marL="0">
+                        <a:buNone/>
+                      </a:pPr>
+                      <a:r>
+                        <a:rPr lang="en-US" sz="1050" b="1" dirty="0">
+                          <a:solidFill>
+                            <a:srgbClr val="FFFFFF"/>
+                          </a:solidFill>
+                          <a:latin typeface="맑은 고딕" pitchFamily="34" charset="0"/>
+                          <a:ea typeface="맑은 고딕" pitchFamily="34" charset="-122"/>
+                          <a:cs typeface="맑은 고딕" pitchFamily="34" charset="-120"/>
+                        </a:rPr>
+                        <a:t>결과</a:t>
+                      </a:r>
+                      <a:endParaRPr lang="en-US" sz="1050" dirty="0">
+                        <a:latin typeface="맑은 고딕" charset="0"/>
+                        <a:ea typeface="맑은 고딕" charset="0"/>
+                        <a:cs typeface="맑은 고딕" charset="0"/>
+                      </a:endParaRPr>
+                    </a:p>
+                  </a:txBody>
+                  <a:tcPr marL="88900" marR="88900" marT="38100" marB="38100" anchor="ctr">
+                    <a:lnL w="6350" cap="flat" cmpd="sng" algn="ctr">
+                      <a:solidFill>
+                        <a:srgbClr val="D8DEE2"/>
+                      </a:solidFill>
+                      <a:prstDash val="solid"/>
+                      <a:round/>
+                      <a:headEnd type="none" w="med" len="med"/>
+                      <a:tailEnd type="none" w="med" len="med"/>
+                    </a:lnL>
+                    <a:lnR w="6350" cap="flat" cmpd="sng" algn="ctr">
+                      <a:solidFill>
+                        <a:srgbClr val="D8DEE2"/>
+                      </a:solidFill>
+                      <a:prstDash val="solid"/>
+                      <a:round/>
+                      <a:headEnd type="none" w="med" len="med"/>
+                      <a:tailEnd type="none" w="med" len="med"/>
+                    </a:lnR>
+                    <a:lnT w="6350" cap="flat" cmpd="sng" algn="ctr">
+                      <a:solidFill>
+                        <a:srgbClr val="D8DEE2"/>
+                      </a:solidFill>
+                      <a:prstDash val="solid"/>
+                      <a:round/>
+                      <a:headEnd type="none" w="med" len="med"/>
+                      <a:tailEnd type="none" w="med" len="med"/>
+                    </a:lnT>
+                    <a:lnB w="6350" cap="flat" cmpd="sng" algn="ctr">
+                      <a:solidFill>
+                        <a:srgbClr val="D8DEE2"/>
+                      </a:solidFill>
+                      <a:prstDash val="solid"/>
+                      <a:round/>
+                      <a:headEnd type="none" w="med" len="med"/>
+                      <a:tailEnd type="none" w="med" len="med"/>
+                    </a:lnB>
+                    <a:solidFill>
+                      <a:srgbClr val="222E35"/>
+                    </a:solidFill>
+                  </a:tcPr>
+                </a:tc>
+              </a:tr>
+              <a:tr h="301752">
+                <a:tc>
+                  <a:txBody>
+                    <a:bodyPr/>
+                    <a:lstStyle/>
+                    <a:p>
+                      <a:pPr algn="ctr" indent="0" marL="0">
+                        <a:buNone/>
+                      </a:pPr>
+                      <a:r>
+                        <a:rPr lang="en-US" sz="1050" b="1" dirty="0">
+                          <a:solidFill>
+                            <a:srgbClr val="1B2429"/>
+                          </a:solidFill>
+                          <a:latin typeface="맑은 고딕" pitchFamily="34" charset="0"/>
+                          <a:ea typeface="맑은 고딕" pitchFamily="34" charset="-122"/>
+                          <a:cs typeface="맑은 고딕" pitchFamily="34" charset="-120"/>
+                        </a:rPr>
+                        <a:t>E1</a:t>
+                      </a:r>
+                      <a:endParaRPr lang="en-US" sz="1050" dirty="0">
+                        <a:latin typeface="맑은 고딕" charset="0"/>
+                        <a:ea typeface="맑은 고딕" charset="0"/>
+                        <a:cs typeface="맑은 고딕" charset="0"/>
+                      </a:endParaRPr>
+                    </a:p>
+                  </a:txBody>
+                  <a:tcPr marL="88900" marR="88900" marT="38100" marB="38100" anchor="ctr">
+                    <a:lnL w="6350" cap="flat" cmpd="sng" algn="ctr">
+                      <a:solidFill>
+                        <a:srgbClr val="D8DEE2"/>
+                      </a:solidFill>
+                      <a:prstDash val="solid"/>
+                      <a:round/>
+                      <a:headEnd type="none" w="med" len="med"/>
+                      <a:tailEnd type="none" w="med" len="med"/>
+                    </a:lnL>
+                    <a:lnR w="6350" cap="flat" cmpd="sng" algn="ctr">
+                      <a:solidFill>
+                        <a:srgbClr val="D8DEE2"/>
+                      </a:solidFill>
+                      <a:prstDash val="solid"/>
+                      <a:round/>
+                      <a:headEnd type="none" w="med" len="med"/>
+                      <a:tailEnd type="none" w="med" len="med"/>
+                    </a:lnR>
+                    <a:lnT w="6350" cap="flat" cmpd="sng" algn="ctr">
+                      <a:solidFill>
+                        <a:srgbClr val="D8DEE2"/>
+                      </a:solidFill>
+                      <a:prstDash val="solid"/>
+                      <a:round/>
+                      <a:headEnd type="none" w="med" len="med"/>
+                      <a:tailEnd type="none" w="med" len="med"/>
+                    </a:lnT>
+                    <a:lnB w="6350" cap="flat" cmpd="sng" algn="ctr">
+                      <a:solidFill>
+                        <a:srgbClr val="D8DEE2"/>
+                      </a:solidFill>
+                      <a:prstDash val="solid"/>
+                      <a:round/>
+                      <a:headEnd type="none" w="med" len="med"/>
+                      <a:tailEnd type="none" w="med" len="med"/>
+                    </a:lnB>
+                  </a:tcPr>
+                </a:tc>
+                <a:tc>
+                  <a:txBody>
+                    <a:bodyPr/>
+                    <a:lstStyle/>
+                    <a:p>
+                      <a:pPr indent="0" marL="0">
+                        <a:buNone/>
+                      </a:pPr>
+                      <a:r>
+                        <a:rPr lang="en-US" sz="1000" dirty="0">
+                          <a:solidFill>
+                            <a:srgbClr val="3C4A52"/>
+                          </a:solidFill>
+                          <a:latin typeface="맑은 고딕" pitchFamily="34" charset="0"/>
+                          <a:ea typeface="맑은 고딕" pitchFamily="34" charset="-122"/>
+                          <a:cs typeface="맑은 고딕" pitchFamily="34" charset="-120"/>
+                        </a:rPr>
+                        <a:t>시스템을 일부러 느리게 해도 멈추지 않고 빠르게 정상화되는지 확인</a:t>
+                      </a:r>
+                      <a:endParaRPr lang="en-US" sz="1000" dirty="0">
+                        <a:latin typeface="맑은 고딕" charset="0"/>
+                        <a:ea typeface="맑은 고딕" charset="0"/>
+                        <a:cs typeface="맑은 고딕" charset="0"/>
+                      </a:endParaRPr>
+                    </a:p>
+                  </a:txBody>
+                  <a:tcPr marL="88900" marR="88900" marT="38100" marB="38100" anchor="ctr">
+                    <a:lnL w="6350" cap="flat" cmpd="sng" algn="ctr">
+                      <a:solidFill>
+                        <a:srgbClr val="D8DEE2"/>
+                      </a:solidFill>
+                      <a:prstDash val="solid"/>
+                      <a:round/>
+                      <a:headEnd type="none" w="med" len="med"/>
+                      <a:tailEnd type="none" w="med" len="med"/>
+                    </a:lnL>
+                    <a:lnR w="6350" cap="flat" cmpd="sng" algn="ctr">
+                      <a:solidFill>
+                        <a:srgbClr val="D8DEE2"/>
+                      </a:solidFill>
+                      <a:prstDash val="solid"/>
+                      <a:round/>
+                      <a:headEnd type="none" w="med" len="med"/>
+                      <a:tailEnd type="none" w="med" len="med"/>
+                    </a:lnR>
+                    <a:lnT w="6350" cap="flat" cmpd="sng" algn="ctr">
+                      <a:solidFill>
+                        <a:srgbClr val="D8DEE2"/>
+                      </a:solidFill>
+                      <a:prstDash val="solid"/>
+                      <a:round/>
+                      <a:headEnd type="none" w="med" len="med"/>
+                      <a:tailEnd type="none" w="med" len="med"/>
+                    </a:lnT>
+                    <a:lnB w="6350" cap="flat" cmpd="sng" algn="ctr">
+                      <a:solidFill>
+                        <a:srgbClr val="D8DEE2"/>
+                      </a:solidFill>
+                      <a:prstDash val="solid"/>
+                      <a:round/>
+                      <a:headEnd type="none" w="med" len="med"/>
+                      <a:tailEnd type="none" w="med" len="med"/>
+                    </a:lnB>
+                  </a:tcPr>
+                </a:tc>
+                <a:tc>
+                  <a:txBody>
+                    <a:bodyPr/>
+                    <a:lstStyle/>
+                    <a:p>
+                      <a:pPr indent="0" marL="0">
+                        <a:buNone/>
+                      </a:pPr>
+                      <a:r>
+                        <a:rPr lang="en-US" sz="1000" b="1" dirty="0">
+                          <a:solidFill>
+                            <a:srgbClr val="2F6B54"/>
+                          </a:solidFill>
+                          <a:latin typeface="맑은 고딕" pitchFamily="34" charset="0"/>
+                          <a:ea typeface="맑은 고딕" pitchFamily="34" charset="-122"/>
+                          <a:cs typeface="맑은 고딕" pitchFamily="34" charset="-120"/>
+                        </a:rPr>
+                        <a:t>PASS · 2.06초 만에 복구</a:t>
+                      </a:r>
+                      <a:endParaRPr lang="en-US" sz="1000" dirty="0">
+                        <a:latin typeface="맑은 고딕" charset="0"/>
+                        <a:ea typeface="맑은 고딕" charset="0"/>
+                        <a:cs typeface="맑은 고딕" charset="0"/>
+                      </a:endParaRPr>
+                    </a:p>
+                  </a:txBody>
+                  <a:tcPr marL="88900" marR="88900" marT="38100" marB="38100" anchor="ctr">
+                    <a:lnL w="6350" cap="flat" cmpd="sng" algn="ctr">
+                      <a:solidFill>
+                        <a:srgbClr val="D8DEE2"/>
+                      </a:solidFill>
+                      <a:prstDash val="solid"/>
+                      <a:round/>
+                      <a:headEnd type="none" w="med" len="med"/>
+                      <a:tailEnd type="none" w="med" len="med"/>
+                    </a:lnL>
+                    <a:lnR w="6350" cap="flat" cmpd="sng" algn="ctr">
+                      <a:solidFill>
+                        <a:srgbClr val="D8DEE2"/>
+                      </a:solidFill>
+                      <a:prstDash val="solid"/>
+                      <a:round/>
+                      <a:headEnd type="none" w="med" len="med"/>
+                      <a:tailEnd type="none" w="med" len="med"/>
+                    </a:lnR>
+                    <a:lnT w="6350" cap="flat" cmpd="sng" algn="ctr">
+                      <a:solidFill>
+                        <a:srgbClr val="D8DEE2"/>
+                      </a:solidFill>
+                      <a:prstDash val="solid"/>
+                      <a:round/>
+                      <a:headEnd type="none" w="med" len="med"/>
+                      <a:tailEnd type="none" w="med" len="med"/>
+                    </a:lnT>
+                    <a:lnB w="6350" cap="flat" cmpd="sng" algn="ctr">
+                      <a:solidFill>
+                        <a:srgbClr val="D8DEE2"/>
+                      </a:solidFill>
+                      <a:prstDash val="solid"/>
+                      <a:round/>
+                      <a:headEnd type="none" w="med" len="med"/>
+                      <a:tailEnd type="none" w="med" len="med"/>
+                    </a:lnB>
+                  </a:tcPr>
+                </a:tc>
+              </a:tr>
+              <a:tr h="301752">
+                <a:tc>
+                  <a:txBody>
+                    <a:bodyPr/>
+                    <a:lstStyle/>
+                    <a:p>
+                      <a:pPr algn="ctr" indent="0" marL="0">
+                        <a:buNone/>
+                      </a:pPr>
+                      <a:r>
+                        <a:rPr lang="en-US" sz="1050" b="1" dirty="0">
+                          <a:solidFill>
+                            <a:srgbClr val="1B2429"/>
+                          </a:solidFill>
+                          <a:latin typeface="맑은 고딕" pitchFamily="34" charset="0"/>
+                          <a:ea typeface="맑은 고딕" pitchFamily="34" charset="-122"/>
+                          <a:cs typeface="맑은 고딕" pitchFamily="34" charset="-120"/>
+                        </a:rPr>
+                        <a:t>E2</a:t>
+                      </a:r>
+                      <a:endParaRPr lang="en-US" sz="1050" dirty="0">
+                        <a:latin typeface="맑은 고딕" charset="0"/>
+                        <a:ea typeface="맑은 고딕" charset="0"/>
+                        <a:cs typeface="맑은 고딕" charset="0"/>
+                      </a:endParaRPr>
+                    </a:p>
+                  </a:txBody>
+                  <a:tcPr marL="88900" marR="88900" marT="38100" marB="38100" anchor="ctr">
+                    <a:lnL w="6350" cap="flat" cmpd="sng" algn="ctr">
+                      <a:solidFill>
+                        <a:srgbClr val="D8DEE2"/>
+                      </a:solidFill>
+                      <a:prstDash val="solid"/>
+                      <a:round/>
+                      <a:headEnd type="none" w="med" len="med"/>
+                      <a:tailEnd type="none" w="med" len="med"/>
+                    </a:lnL>
+                    <a:lnR w="6350" cap="flat" cmpd="sng" algn="ctr">
+                      <a:solidFill>
+                        <a:srgbClr val="D8DEE2"/>
+                      </a:solidFill>
+                      <a:prstDash val="solid"/>
+                      <a:round/>
+                      <a:headEnd type="none" w="med" len="med"/>
+                      <a:tailEnd type="none" w="med" len="med"/>
+                    </a:lnR>
+                    <a:lnT w="6350" cap="flat" cmpd="sng" algn="ctr">
+                      <a:solidFill>
+                        <a:srgbClr val="D8DEE2"/>
+                      </a:solidFill>
+                      <a:prstDash val="solid"/>
+                      <a:round/>
+                      <a:headEnd type="none" w="med" len="med"/>
+                      <a:tailEnd type="none" w="med" len="med"/>
+                    </a:lnT>
+                    <a:lnB w="6350" cap="flat" cmpd="sng" algn="ctr">
+                      <a:solidFill>
+                        <a:srgbClr val="D8DEE2"/>
+                      </a:solidFill>
+                      <a:prstDash val="solid"/>
+                      <a:round/>
+                      <a:headEnd type="none" w="med" len="med"/>
+                      <a:tailEnd type="none" w="med" len="med"/>
+                    </a:lnB>
+                  </a:tcPr>
+                </a:tc>
+                <a:tc>
+                  <a:txBody>
+                    <a:bodyPr/>
+                    <a:lstStyle/>
+                    <a:p>
+                      <a:pPr indent="0" marL="0">
+                        <a:buNone/>
+                      </a:pPr>
+                      <a:r>
+                        <a:rPr lang="en-US" sz="1000" dirty="0">
+                          <a:solidFill>
+                            <a:srgbClr val="3C4A52"/>
+                          </a:solidFill>
+                          <a:latin typeface="맑은 고딕" pitchFamily="34" charset="0"/>
+                          <a:ea typeface="맑은 고딕" pitchFamily="34" charset="-122"/>
+                          <a:cs typeface="맑은 고딕" pitchFamily="34" charset="-120"/>
+                        </a:rPr>
+                        <a:t>저장소 연결이 끊겨도 데이터 유실 없이 새 대표가 정상 전환되는지 확인</a:t>
+                      </a:r>
+                      <a:endParaRPr lang="en-US" sz="1000" dirty="0">
+                        <a:latin typeface="맑은 고딕" charset="0"/>
+                        <a:ea typeface="맑은 고딕" charset="0"/>
+                        <a:cs typeface="맑은 고딕" charset="0"/>
+                      </a:endParaRPr>
+                    </a:p>
+                  </a:txBody>
+                  <a:tcPr marL="88900" marR="88900" marT="38100" marB="38100" anchor="ctr">
+                    <a:lnL w="6350" cap="flat" cmpd="sng" algn="ctr">
+                      <a:solidFill>
+                        <a:srgbClr val="D8DEE2"/>
+                      </a:solidFill>
+                      <a:prstDash val="solid"/>
+                      <a:round/>
+                      <a:headEnd type="none" w="med" len="med"/>
+                      <a:tailEnd type="none" w="med" len="med"/>
+                    </a:lnL>
+                    <a:lnR w="6350" cap="flat" cmpd="sng" algn="ctr">
+                      <a:solidFill>
+                        <a:srgbClr val="D8DEE2"/>
+                      </a:solidFill>
+                      <a:prstDash val="solid"/>
+                      <a:round/>
+                      <a:headEnd type="none" w="med" len="med"/>
+                      <a:tailEnd type="none" w="med" len="med"/>
+                    </a:lnR>
+                    <a:lnT w="6350" cap="flat" cmpd="sng" algn="ctr">
+                      <a:solidFill>
+                        <a:srgbClr val="D8DEE2"/>
+                      </a:solidFill>
+                      <a:prstDash val="solid"/>
+                      <a:round/>
+                      <a:headEnd type="none" w="med" len="med"/>
+                      <a:tailEnd type="none" w="med" len="med"/>
+                    </a:lnT>
+                    <a:lnB w="6350" cap="flat" cmpd="sng" algn="ctr">
+                      <a:solidFill>
+                        <a:srgbClr val="D8DEE2"/>
+                      </a:solidFill>
+                      <a:prstDash val="solid"/>
+                      <a:round/>
+                      <a:headEnd type="none" w="med" len="med"/>
+                      <a:tailEnd type="none" w="med" len="med"/>
+                    </a:lnB>
+                  </a:tcPr>
+                </a:tc>
+                <a:tc>
+                  <a:txBody>
+                    <a:bodyPr/>
+                    <a:lstStyle/>
+                    <a:p>
+                      <a:pPr indent="0" marL="0">
+                        <a:buNone/>
+                      </a:pPr>
+                      <a:r>
+                        <a:rPr lang="en-US" sz="1000" b="1" dirty="0">
+                          <a:solidFill>
+                            <a:srgbClr val="2F6B54"/>
+                          </a:solidFill>
+                          <a:latin typeface="맑은 고딕" pitchFamily="34" charset="0"/>
+                          <a:ea typeface="맑은 고딕" pitchFamily="34" charset="-122"/>
+                          <a:cs typeface="맑은 고딕" pitchFamily="34" charset="-120"/>
+                        </a:rPr>
+                        <a:t>PASS · 약 13.9초 만에 복구</a:t>
+                      </a:r>
+                      <a:endParaRPr lang="en-US" sz="1000" dirty="0">
+                        <a:latin typeface="맑은 고딕" charset="0"/>
+                        <a:ea typeface="맑은 고딕" charset="0"/>
+                        <a:cs typeface="맑은 고딕" charset="0"/>
+                      </a:endParaRPr>
+                    </a:p>
+                  </a:txBody>
+                  <a:tcPr marL="88900" marR="88900" marT="38100" marB="38100" anchor="ctr">
+                    <a:lnL w="6350" cap="flat" cmpd="sng" algn="ctr">
+                      <a:solidFill>
+                        <a:srgbClr val="D8DEE2"/>
+                      </a:solidFill>
+                      <a:prstDash val="solid"/>
+                      <a:round/>
+                      <a:headEnd type="none" w="med" len="med"/>
+                      <a:tailEnd type="none" w="med" len="med"/>
+                    </a:lnL>
+                    <a:lnR w="6350" cap="flat" cmpd="sng" algn="ctr">
+                      <a:solidFill>
+                        <a:srgbClr val="D8DEE2"/>
+                      </a:solidFill>
+                      <a:prstDash val="solid"/>
+                      <a:round/>
+                      <a:headEnd type="none" w="med" len="med"/>
+                      <a:tailEnd type="none" w="med" len="med"/>
+                    </a:lnR>
+                    <a:lnT w="6350" cap="flat" cmpd="sng" algn="ctr">
+                      <a:solidFill>
+                        <a:srgbClr val="D8DEE2"/>
+                      </a:solidFill>
+                      <a:prstDash val="solid"/>
+                      <a:round/>
+                      <a:headEnd type="none" w="med" len="med"/>
+                      <a:tailEnd type="none" w="med" len="med"/>
+                    </a:lnT>
+                    <a:lnB w="6350" cap="flat" cmpd="sng" algn="ctr">
+                      <a:solidFill>
+                        <a:srgbClr val="D8DEE2"/>
+                      </a:solidFill>
+                      <a:prstDash val="solid"/>
+                      <a:round/>
+                      <a:headEnd type="none" w="med" len="med"/>
+                      <a:tailEnd type="none" w="med" len="med"/>
+                    </a:lnB>
+                  </a:tcPr>
+                </a:tc>
+              </a:tr>
+              <a:tr h="301752">
+                <a:tc>
+                  <a:txBody>
+                    <a:bodyPr/>
+                    <a:lstStyle/>
+                    <a:p>
+                      <a:pPr algn="ctr" indent="0" marL="0">
+                        <a:buNone/>
+                      </a:pPr>
+                      <a:r>
+                        <a:rPr lang="en-US" sz="1050" b="1" dirty="0">
+                          <a:solidFill>
+                            <a:srgbClr val="1B2429"/>
+                          </a:solidFill>
+                          <a:latin typeface="맑은 고딕" pitchFamily="34" charset="0"/>
+                          <a:ea typeface="맑은 고딕" pitchFamily="34" charset="-122"/>
+                          <a:cs typeface="맑은 고딕" pitchFamily="34" charset="-120"/>
+                        </a:rPr>
+                        <a:t>E3</a:t>
+                      </a:r>
+                      <a:endParaRPr lang="en-US" sz="1050" dirty="0">
+                        <a:latin typeface="맑은 고딕" charset="0"/>
+                        <a:ea typeface="맑은 고딕" charset="0"/>
+                        <a:cs typeface="맑은 고딕" charset="0"/>
+                      </a:endParaRPr>
+                    </a:p>
+                  </a:txBody>
+                  <a:tcPr marL="88900" marR="88900" marT="38100" marB="38100" anchor="ctr">
+                    <a:lnL w="6350" cap="flat" cmpd="sng" algn="ctr">
+                      <a:solidFill>
+                        <a:srgbClr val="D8DEE2"/>
+                      </a:solidFill>
+                      <a:prstDash val="solid"/>
+                      <a:round/>
+                      <a:headEnd type="none" w="med" len="med"/>
+                      <a:tailEnd type="none" w="med" len="med"/>
+                    </a:lnL>
+                    <a:lnR w="6350" cap="flat" cmpd="sng" algn="ctr">
+                      <a:solidFill>
+                        <a:srgbClr val="D8DEE2"/>
+                      </a:solidFill>
+                      <a:prstDash val="solid"/>
+                      <a:round/>
+                      <a:headEnd type="none" w="med" len="med"/>
+                      <a:tailEnd type="none" w="med" len="med"/>
+                    </a:lnR>
+                    <a:lnT w="6350" cap="flat" cmpd="sng" algn="ctr">
+                      <a:solidFill>
+                        <a:srgbClr val="D8DEE2"/>
+                      </a:solidFill>
+                      <a:prstDash val="solid"/>
+                      <a:round/>
+                      <a:headEnd type="none" w="med" len="med"/>
+                      <a:tailEnd type="none" w="med" len="med"/>
+                    </a:lnT>
+                    <a:lnB w="6350" cap="flat" cmpd="sng" algn="ctr">
+                      <a:solidFill>
+                        <a:srgbClr val="D8DEE2"/>
+                      </a:solidFill>
+                      <a:prstDash val="solid"/>
+                      <a:round/>
+                      <a:headEnd type="none" w="med" len="med"/>
+                      <a:tailEnd type="none" w="med" len="med"/>
+                    </a:lnB>
+                  </a:tcPr>
+                </a:tc>
+                <a:tc>
+                  <a:txBody>
+                    <a:bodyPr/>
+                    <a:lstStyle/>
+                    <a:p>
+                      <a:pPr indent="0" marL="0">
+                        <a:buNone/>
+                      </a:pPr>
+                      <a:r>
+                        <a:rPr lang="en-US" sz="1000" dirty="0">
+                          <a:solidFill>
+                            <a:srgbClr val="3C4A52"/>
+                          </a:solidFill>
+                          <a:latin typeface="맑은 고딕" pitchFamily="34" charset="0"/>
+                          <a:ea typeface="맑은 고딕" pitchFamily="34" charset="-122"/>
+                          <a:cs typeface="맑은 고딕" pitchFamily="34" charset="-120"/>
+                        </a:rPr>
+                        <a:t>Redis가 중단돼도 핵심 서비스에 영향이 없는지 확인</a:t>
+                      </a:r>
+                      <a:endParaRPr lang="en-US" sz="1000" dirty="0">
+                        <a:latin typeface="맑은 고딕" charset="0"/>
+                        <a:ea typeface="맑은 고딕" charset="0"/>
+                        <a:cs typeface="맑은 고딕" charset="0"/>
+                      </a:endParaRPr>
+                    </a:p>
+                  </a:txBody>
+                  <a:tcPr marL="88900" marR="88900" marT="38100" marB="38100" anchor="ctr">
+                    <a:lnL w="6350" cap="flat" cmpd="sng" algn="ctr">
+                      <a:solidFill>
+                        <a:srgbClr val="D8DEE2"/>
+                      </a:solidFill>
+                      <a:prstDash val="solid"/>
+                      <a:round/>
+                      <a:headEnd type="none" w="med" len="med"/>
+                      <a:tailEnd type="none" w="med" len="med"/>
+                    </a:lnL>
+                    <a:lnR w="6350" cap="flat" cmpd="sng" algn="ctr">
+                      <a:solidFill>
+                        <a:srgbClr val="D8DEE2"/>
+                      </a:solidFill>
+                      <a:prstDash val="solid"/>
+                      <a:round/>
+                      <a:headEnd type="none" w="med" len="med"/>
+                      <a:tailEnd type="none" w="med" len="med"/>
+                    </a:lnR>
+                    <a:lnT w="6350" cap="flat" cmpd="sng" algn="ctr">
+                      <a:solidFill>
+                        <a:srgbClr val="D8DEE2"/>
+                      </a:solidFill>
+                      <a:prstDash val="solid"/>
+                      <a:round/>
+                      <a:headEnd type="none" w="med" len="med"/>
+                      <a:tailEnd type="none" w="med" len="med"/>
+                    </a:lnT>
+                    <a:lnB w="6350" cap="flat" cmpd="sng" algn="ctr">
+                      <a:solidFill>
+                        <a:srgbClr val="D8DEE2"/>
+                      </a:solidFill>
+                      <a:prstDash val="solid"/>
+                      <a:round/>
+                      <a:headEnd type="none" w="med" len="med"/>
+                      <a:tailEnd type="none" w="med" len="med"/>
+                    </a:lnB>
+                  </a:tcPr>
+                </a:tc>
+                <a:tc>
+                  <a:txBody>
+                    <a:bodyPr/>
+                    <a:lstStyle/>
+                    <a:p>
+                      <a:pPr indent="0" marL="0">
+                        <a:buNone/>
+                      </a:pPr>
+                      <a:r>
+                        <a:rPr lang="en-US" sz="1000" b="1" dirty="0">
+                          <a:solidFill>
+                            <a:srgbClr val="7A8A93"/>
+                          </a:solidFill>
+                          <a:latin typeface="맑은 고딕" pitchFamily="34" charset="0"/>
+                          <a:ea typeface="맑은 고딕" pitchFamily="34" charset="-122"/>
+                          <a:cs typeface="맑은 고딕" pitchFamily="34" charset="-120"/>
+                        </a:rPr>
+                        <a:t>정상 SKIP · 실제 의존 관계 없음</a:t>
+                      </a:r>
+                      <a:endParaRPr lang="en-US" sz="1000" dirty="0">
+                        <a:latin typeface="맑은 고딕" charset="0"/>
+                        <a:ea typeface="맑은 고딕" charset="0"/>
+                        <a:cs typeface="맑은 고딕" charset="0"/>
+                      </a:endParaRPr>
+                    </a:p>
+                  </a:txBody>
+                  <a:tcPr marL="88900" marR="88900" marT="38100" marB="38100" anchor="ctr">
+                    <a:lnL w="6350" cap="flat" cmpd="sng" algn="ctr">
+                      <a:solidFill>
+                        <a:srgbClr val="D8DEE2"/>
+                      </a:solidFill>
+                      <a:prstDash val="solid"/>
+                      <a:round/>
+                      <a:headEnd type="none" w="med" len="med"/>
+                      <a:tailEnd type="none" w="med" len="med"/>
+                    </a:lnL>
+                    <a:lnR w="6350" cap="flat" cmpd="sng" algn="ctr">
+                      <a:solidFill>
+                        <a:srgbClr val="D8DEE2"/>
+                      </a:solidFill>
+                      <a:prstDash val="solid"/>
+                      <a:round/>
+                      <a:headEnd type="none" w="med" len="med"/>
+                      <a:tailEnd type="none" w="med" len="med"/>
+                    </a:lnR>
+                    <a:lnT w="6350" cap="flat" cmpd="sng" algn="ctr">
+                      <a:solidFill>
+                        <a:srgbClr val="D8DEE2"/>
+                      </a:solidFill>
+                      <a:prstDash val="solid"/>
+                      <a:round/>
+                      <a:headEnd type="none" w="med" len="med"/>
+                      <a:tailEnd type="none" w="med" len="med"/>
+                    </a:lnT>
+                    <a:lnB w="6350" cap="flat" cmpd="sng" algn="ctr">
+                      <a:solidFill>
+                        <a:srgbClr val="D8DEE2"/>
+                      </a:solidFill>
+                      <a:prstDash val="solid"/>
+                      <a:round/>
+                      <a:headEnd type="none" w="med" len="med"/>
+                      <a:tailEnd type="none" w="med" len="med"/>
+                    </a:lnB>
+                  </a:tcPr>
+                </a:tc>
+              </a:tr>
+              <a:tr h="301752">
+                <a:tc>
+                  <a:txBody>
+                    <a:bodyPr/>
+                    <a:lstStyle/>
+                    <a:p>
+                      <a:pPr algn="ctr" indent="0" marL="0">
+                        <a:buNone/>
+                      </a:pPr>
+                      <a:r>
+                        <a:rPr lang="en-US" sz="1050" b="1" dirty="0">
+                          <a:solidFill>
+                            <a:srgbClr val="1B2429"/>
+                          </a:solidFill>
+                          <a:latin typeface="맑은 고딕" pitchFamily="34" charset="0"/>
+                          <a:ea typeface="맑은 고딕" pitchFamily="34" charset="-122"/>
+                          <a:cs typeface="맑은 고딕" pitchFamily="34" charset="-120"/>
+                        </a:rPr>
+                        <a:t>E4</a:t>
+                      </a:r>
+                      <a:endParaRPr lang="en-US" sz="1050" dirty="0">
+                        <a:latin typeface="맑은 고딕" charset="0"/>
+                        <a:ea typeface="맑은 고딕" charset="0"/>
+                        <a:cs typeface="맑은 고딕" charset="0"/>
+                      </a:endParaRPr>
+                    </a:p>
+                  </a:txBody>
+                  <a:tcPr marL="88900" marR="88900" marT="38100" marB="38100" anchor="ctr">
+                    <a:lnL w="6350" cap="flat" cmpd="sng" algn="ctr">
+                      <a:solidFill>
+                        <a:srgbClr val="D8DEE2"/>
+                      </a:solidFill>
+                      <a:prstDash val="solid"/>
+                      <a:round/>
+                      <a:headEnd type="none" w="med" len="med"/>
+                      <a:tailEnd type="none" w="med" len="med"/>
+                    </a:lnL>
+                    <a:lnR w="6350" cap="flat" cmpd="sng" algn="ctr">
+                      <a:solidFill>
+                        <a:srgbClr val="D8DEE2"/>
+                      </a:solidFill>
+                      <a:prstDash val="solid"/>
+                      <a:round/>
+                      <a:headEnd type="none" w="med" len="med"/>
+                      <a:tailEnd type="none" w="med" len="med"/>
+                    </a:lnR>
+                    <a:lnT w="6350" cap="flat" cmpd="sng" algn="ctr">
+                      <a:solidFill>
+                        <a:srgbClr val="D8DEE2"/>
+                      </a:solidFill>
+                      <a:prstDash val="solid"/>
+                      <a:round/>
+                      <a:headEnd type="none" w="med" len="med"/>
+                      <a:tailEnd type="none" w="med" len="med"/>
+                    </a:lnT>
+                    <a:lnB w="6350" cap="flat" cmpd="sng" algn="ctr">
+                      <a:solidFill>
+                        <a:srgbClr val="D8DEE2"/>
+                      </a:solidFill>
+                      <a:prstDash val="solid"/>
+                      <a:round/>
+                      <a:headEnd type="none" w="med" len="med"/>
+                      <a:tailEnd type="none" w="med" len="med"/>
+                    </a:lnB>
+                  </a:tcPr>
+                </a:tc>
+                <a:tc>
+                  <a:txBody>
+                    <a:bodyPr/>
+                    <a:lstStyle/>
+                    <a:p>
+                      <a:pPr indent="0" marL="0">
+                        <a:buNone/>
+                      </a:pPr>
+                      <a:r>
+                        <a:rPr lang="en-US" sz="1000" dirty="0">
+                          <a:solidFill>
+                            <a:srgbClr val="3C4A52"/>
+                          </a:solidFill>
+                          <a:latin typeface="맑은 고딕" pitchFamily="34" charset="0"/>
+                          <a:ea typeface="맑은 고딕" pitchFamily="34" charset="-122"/>
+                          <a:cs typeface="맑은 고딕" pitchFamily="34" charset="-120"/>
+                        </a:rPr>
+                        <a:t>대표 서버가 갑자기 죽어도 30초 안에 자동 복구되는지 확인</a:t>
+                      </a:r>
+                      <a:endParaRPr lang="en-US" sz="1000" dirty="0">
+                        <a:latin typeface="맑은 고딕" charset="0"/>
+                        <a:ea typeface="맑은 고딕" charset="0"/>
+                        <a:cs typeface="맑은 고딕" charset="0"/>
+                      </a:endParaRPr>
+                    </a:p>
+                  </a:txBody>
+                  <a:tcPr marL="88900" marR="88900" marT="38100" marB="38100" anchor="ctr">
+                    <a:lnL w="6350" cap="flat" cmpd="sng" algn="ctr">
+                      <a:solidFill>
+                        <a:srgbClr val="D8DEE2"/>
+                      </a:solidFill>
+                      <a:prstDash val="solid"/>
+                      <a:round/>
+                      <a:headEnd type="none" w="med" len="med"/>
+                      <a:tailEnd type="none" w="med" len="med"/>
+                    </a:lnL>
+                    <a:lnR w="6350" cap="flat" cmpd="sng" algn="ctr">
+                      <a:solidFill>
+                        <a:srgbClr val="D8DEE2"/>
+                      </a:solidFill>
+                      <a:prstDash val="solid"/>
+                      <a:round/>
+                      <a:headEnd type="none" w="med" len="med"/>
+                      <a:tailEnd type="none" w="med" len="med"/>
+                    </a:lnR>
+                    <a:lnT w="6350" cap="flat" cmpd="sng" algn="ctr">
+                      <a:solidFill>
+                        <a:srgbClr val="D8DEE2"/>
+                      </a:solidFill>
+                      <a:prstDash val="solid"/>
+                      <a:round/>
+                      <a:headEnd type="none" w="med" len="med"/>
+                      <a:tailEnd type="none" w="med" len="med"/>
+                    </a:lnT>
+                    <a:lnB w="6350" cap="flat" cmpd="sng" algn="ctr">
+                      <a:solidFill>
+                        <a:srgbClr val="D8DEE2"/>
+                      </a:solidFill>
+                      <a:prstDash val="solid"/>
+                      <a:round/>
+                      <a:headEnd type="none" w="med" len="med"/>
+                      <a:tailEnd type="none" w="med" len="med"/>
+                    </a:lnB>
+                  </a:tcPr>
+                </a:tc>
+                <a:tc>
+                  <a:txBody>
+                    <a:bodyPr/>
+                    <a:lstStyle/>
+                    <a:p>
+                      <a:pPr indent="0" marL="0">
+                        <a:buNone/>
+                      </a:pPr>
+                      <a:r>
+                        <a:rPr lang="en-US" sz="1000" b="1" dirty="0">
+                          <a:solidFill>
+                            <a:srgbClr val="B33A32"/>
+                          </a:solidFill>
+                          <a:latin typeface="맑은 고딕" pitchFamily="34" charset="0"/>
+                          <a:ea typeface="맑은 고딕" pitchFamily="34" charset="-122"/>
+                          <a:cs typeface="맑은 고딕" pitchFamily="34" charset="-120"/>
+                        </a:rPr>
+                        <a:t>미확인 · 기준 변경 후 재시험 필요</a:t>
+                      </a:r>
+                      <a:endParaRPr lang="en-US" sz="1000" dirty="0">
+                        <a:latin typeface="맑은 고딕" charset="0"/>
+                        <a:ea typeface="맑은 고딕" charset="0"/>
+                        <a:cs typeface="맑은 고딕" charset="0"/>
+                      </a:endParaRPr>
+                    </a:p>
+                  </a:txBody>
+                  <a:tcPr marL="88900" marR="88900" marT="38100" marB="38100" anchor="ctr">
+                    <a:lnL w="6350" cap="flat" cmpd="sng" algn="ctr">
+                      <a:solidFill>
+                        <a:srgbClr val="D8DEE2"/>
+                      </a:solidFill>
+                      <a:prstDash val="solid"/>
+                      <a:round/>
+                      <a:headEnd type="none" w="med" len="med"/>
+                      <a:tailEnd type="none" w="med" len="med"/>
+                    </a:lnL>
+                    <a:lnR w="6350" cap="flat" cmpd="sng" algn="ctr">
+                      <a:solidFill>
+                        <a:srgbClr val="D8DEE2"/>
+                      </a:solidFill>
+                      <a:prstDash val="solid"/>
+                      <a:round/>
+                      <a:headEnd type="none" w="med" len="med"/>
+                      <a:tailEnd type="none" w="med" len="med"/>
+                    </a:lnR>
+                    <a:lnT w="6350" cap="flat" cmpd="sng" algn="ctr">
+                      <a:solidFill>
+                        <a:srgbClr val="D8DEE2"/>
+                      </a:solidFill>
+                      <a:prstDash val="solid"/>
+                      <a:round/>
+                      <a:headEnd type="none" w="med" len="med"/>
+                      <a:tailEnd type="none" w="med" len="med"/>
+                    </a:lnT>
+                    <a:lnB w="6350" cap="flat" cmpd="sng" algn="ctr">
+                      <a:solidFill>
+                        <a:srgbClr val="D8DEE2"/>
+                      </a:solidFill>
+                      <a:prstDash val="solid"/>
+                      <a:round/>
+                      <a:headEnd type="none" w="med" len="med"/>
+                      <a:tailEnd type="none" w="med" len="med"/>
+                    </a:lnB>
+                  </a:tcPr>
+                </a:tc>
+              </a:tr>
+              <a:tr h="301752">
+                <a:tc>
+                  <a:txBody>
+                    <a:bodyPr/>
+                    <a:lstStyle/>
+                    <a:p>
+                      <a:pPr algn="ctr" indent="0" marL="0">
+                        <a:buNone/>
+                      </a:pPr>
+                      <a:r>
+                        <a:rPr lang="en-US" sz="1050" b="1" dirty="0">
+                          <a:solidFill>
+                            <a:srgbClr val="1B2429"/>
+                          </a:solidFill>
+                          <a:latin typeface="맑은 고딕" pitchFamily="34" charset="0"/>
+                          <a:ea typeface="맑은 고딕" pitchFamily="34" charset="-122"/>
+                          <a:cs typeface="맑은 고딕" pitchFamily="34" charset="-120"/>
+                        </a:rPr>
+                        <a:t>E5</a:t>
+                      </a:r>
+                      <a:endParaRPr lang="en-US" sz="1050" dirty="0">
+                        <a:latin typeface="맑은 고딕" charset="0"/>
+                        <a:ea typeface="맑은 고딕" charset="0"/>
+                        <a:cs typeface="맑은 고딕" charset="0"/>
+                      </a:endParaRPr>
+                    </a:p>
+                  </a:txBody>
+                  <a:tcPr marL="88900" marR="88900" marT="38100" marB="38100" anchor="ctr">
+                    <a:lnL w="6350" cap="flat" cmpd="sng" algn="ctr">
+                      <a:solidFill>
+                        <a:srgbClr val="D8DEE2"/>
+                      </a:solidFill>
+                      <a:prstDash val="solid"/>
+                      <a:round/>
+                      <a:headEnd type="none" w="med" len="med"/>
+                      <a:tailEnd type="none" w="med" len="med"/>
+                    </a:lnL>
+                    <a:lnR w="6350" cap="flat" cmpd="sng" algn="ctr">
+                      <a:solidFill>
+                        <a:srgbClr val="D8DEE2"/>
+                      </a:solidFill>
+                      <a:prstDash val="solid"/>
+                      <a:round/>
+                      <a:headEnd type="none" w="med" len="med"/>
+                      <a:tailEnd type="none" w="med" len="med"/>
+                    </a:lnR>
+                    <a:lnT w="6350" cap="flat" cmpd="sng" algn="ctr">
+                      <a:solidFill>
+                        <a:srgbClr val="D8DEE2"/>
+                      </a:solidFill>
+                      <a:prstDash val="solid"/>
+                      <a:round/>
+                      <a:headEnd type="none" w="med" len="med"/>
+                      <a:tailEnd type="none" w="med" len="med"/>
+                    </a:lnT>
+                    <a:lnB w="6350" cap="flat" cmpd="sng" algn="ctr">
+                      <a:solidFill>
+                        <a:srgbClr val="D8DEE2"/>
+                      </a:solidFill>
+                      <a:prstDash val="solid"/>
+                      <a:round/>
+                      <a:headEnd type="none" w="med" len="med"/>
+                      <a:tailEnd type="none" w="med" len="med"/>
+                    </a:lnB>
+                  </a:tcPr>
+                </a:tc>
+                <a:tc>
+                  <a:txBody>
+                    <a:bodyPr/>
+                    <a:lstStyle/>
+                    <a:p>
+                      <a:pPr indent="0" marL="0">
+                        <a:buNone/>
+                      </a:pPr>
+                      <a:r>
+                        <a:rPr lang="en-US" sz="1000" dirty="0">
+                          <a:solidFill>
+                            <a:srgbClr val="3C4A52"/>
+                          </a:solidFill>
+                          <a:latin typeface="맑은 고딕" pitchFamily="34" charset="0"/>
+                          <a:ea typeface="맑은 고딕" pitchFamily="34" charset="-122"/>
+                          <a:cs typeface="맑은 고딕" pitchFamily="34" charset="-120"/>
+                        </a:rPr>
+                        <a:t>대표 서버의 네트워크가 끊겨도 새 대표로 안전하게 전환되는지 확인</a:t>
+                      </a:r>
+                      <a:endParaRPr lang="en-US" sz="1000" dirty="0">
+                        <a:latin typeface="맑은 고딕" charset="0"/>
+                        <a:ea typeface="맑은 고딕" charset="0"/>
+                        <a:cs typeface="맑은 고딕" charset="0"/>
+                      </a:endParaRPr>
+                    </a:p>
+                  </a:txBody>
+                  <a:tcPr marL="88900" marR="88900" marT="38100" marB="38100" anchor="ctr">
+                    <a:lnL w="6350" cap="flat" cmpd="sng" algn="ctr">
+                      <a:solidFill>
+                        <a:srgbClr val="D8DEE2"/>
+                      </a:solidFill>
+                      <a:prstDash val="solid"/>
+                      <a:round/>
+                      <a:headEnd type="none" w="med" len="med"/>
+                      <a:tailEnd type="none" w="med" len="med"/>
+                    </a:lnL>
+                    <a:lnR w="6350" cap="flat" cmpd="sng" algn="ctr">
+                      <a:solidFill>
+                        <a:srgbClr val="D8DEE2"/>
+                      </a:solidFill>
+                      <a:prstDash val="solid"/>
+                      <a:round/>
+                      <a:headEnd type="none" w="med" len="med"/>
+                      <a:tailEnd type="none" w="med" len="med"/>
+                    </a:lnR>
+                    <a:lnT w="6350" cap="flat" cmpd="sng" algn="ctr">
+                      <a:solidFill>
+                        <a:srgbClr val="D8DEE2"/>
+                      </a:solidFill>
+                      <a:prstDash val="solid"/>
+                      <a:round/>
+                      <a:headEnd type="none" w="med" len="med"/>
+                      <a:tailEnd type="none" w="med" len="med"/>
+                    </a:lnT>
+                    <a:lnB w="6350" cap="flat" cmpd="sng" algn="ctr">
+                      <a:solidFill>
+                        <a:srgbClr val="D8DEE2"/>
+                      </a:solidFill>
+                      <a:prstDash val="solid"/>
+                      <a:round/>
+                      <a:headEnd type="none" w="med" len="med"/>
+                      <a:tailEnd type="none" w="med" len="med"/>
+                    </a:lnB>
+                  </a:tcPr>
+                </a:tc>
+                <a:tc>
+                  <a:txBody>
+                    <a:bodyPr/>
+                    <a:lstStyle/>
+                    <a:p>
+                      <a:pPr indent="0" marL="0">
+                        <a:buNone/>
+                      </a:pPr>
+                      <a:r>
+                        <a:rPr lang="en-US" sz="1000" b="1" dirty="0">
+                          <a:solidFill>
+                            <a:srgbClr val="2F6B54"/>
+                          </a:solidFill>
+                          <a:latin typeface="맑은 고딕" pitchFamily="34" charset="0"/>
+                          <a:ea typeface="맑은 고딕" pitchFamily="34" charset="-122"/>
+                          <a:cs typeface="맑은 고딕" pitchFamily="34" charset="-120"/>
+                        </a:rPr>
+                        <a:t>PASS · 약 12초 만에 복구, 오류 0건</a:t>
+                      </a:r>
+                      <a:endParaRPr lang="en-US" sz="1000" dirty="0">
+                        <a:latin typeface="맑은 고딕" charset="0"/>
+                        <a:ea typeface="맑은 고딕" charset="0"/>
+                        <a:cs typeface="맑은 고딕" charset="0"/>
+                      </a:endParaRPr>
+                    </a:p>
+                  </a:txBody>
+                  <a:tcPr marL="88900" marR="88900" marT="38100" marB="38100" anchor="ctr">
+                    <a:lnL w="6350" cap="flat" cmpd="sng" algn="ctr">
+                      <a:solidFill>
+                        <a:srgbClr val="D8DEE2"/>
+                      </a:solidFill>
+                      <a:prstDash val="solid"/>
+                      <a:round/>
+                      <a:headEnd type="none" w="med" len="med"/>
+                      <a:tailEnd type="none" w="med" len="med"/>
+                    </a:lnL>
+                    <a:lnR w="6350" cap="flat" cmpd="sng" algn="ctr">
+                      <a:solidFill>
+                        <a:srgbClr val="D8DEE2"/>
+                      </a:solidFill>
+                      <a:prstDash val="solid"/>
+                      <a:round/>
+                      <a:headEnd type="none" w="med" len="med"/>
+                      <a:tailEnd type="none" w="med" len="med"/>
+                    </a:lnR>
+                    <a:lnT w="6350" cap="flat" cmpd="sng" algn="ctr">
+                      <a:solidFill>
+                        <a:srgbClr val="D8DEE2"/>
+                      </a:solidFill>
+                      <a:prstDash val="solid"/>
+                      <a:round/>
+                      <a:headEnd type="none" w="med" len="med"/>
+                      <a:tailEnd type="none" w="med" len="med"/>
+                    </a:lnT>
+                    <a:lnB w="6350" cap="flat" cmpd="sng" algn="ctr">
+                      <a:solidFill>
+                        <a:srgbClr val="D8DEE2"/>
+                      </a:solidFill>
+                      <a:prstDash val="solid"/>
+                      <a:round/>
+                      <a:headEnd type="none" w="med" len="med"/>
+                      <a:tailEnd type="none" w="med" len="med"/>
+                    </a:lnB>
+                  </a:tcPr>
+                </a:tc>
+              </a:tr>
+              <a:tr h="301752">
+                <a:tc>
+                  <a:txBody>
+                    <a:bodyPr/>
+                    <a:lstStyle/>
+                    <a:p>
+                      <a:pPr algn="ctr" indent="0" marL="0">
+                        <a:buNone/>
+                      </a:pPr>
+                      <a:r>
+                        <a:rPr lang="en-US" sz="1050" b="1" dirty="0">
+                          <a:solidFill>
+                            <a:srgbClr val="1B2429"/>
+                          </a:solidFill>
+                          <a:latin typeface="맑은 고딕" pitchFamily="34" charset="0"/>
+                          <a:ea typeface="맑은 고딕" pitchFamily="34" charset="-122"/>
+                          <a:cs typeface="맑은 고딕" pitchFamily="34" charset="-120"/>
+                        </a:rPr>
+                        <a:t>E6</a:t>
+                      </a:r>
+                      <a:endParaRPr lang="en-US" sz="1050" dirty="0">
+                        <a:latin typeface="맑은 고딕" charset="0"/>
+                        <a:ea typeface="맑은 고딕" charset="0"/>
+                        <a:cs typeface="맑은 고딕" charset="0"/>
+                      </a:endParaRPr>
+                    </a:p>
+                  </a:txBody>
+                  <a:tcPr marL="88900" marR="88900" marT="38100" marB="38100" anchor="ctr">
+                    <a:lnL w="6350" cap="flat" cmpd="sng" algn="ctr">
+                      <a:solidFill>
+                        <a:srgbClr val="D8DEE2"/>
+                      </a:solidFill>
+                      <a:prstDash val="solid"/>
+                      <a:round/>
+                      <a:headEnd type="none" w="med" len="med"/>
+                      <a:tailEnd type="none" w="med" len="med"/>
+                    </a:lnL>
+                    <a:lnR w="6350" cap="flat" cmpd="sng" algn="ctr">
+                      <a:solidFill>
+                        <a:srgbClr val="D8DEE2"/>
+                      </a:solidFill>
+                      <a:prstDash val="solid"/>
+                      <a:round/>
+                      <a:headEnd type="none" w="med" len="med"/>
+                      <a:tailEnd type="none" w="med" len="med"/>
+                    </a:lnR>
+                    <a:lnT w="6350" cap="flat" cmpd="sng" algn="ctr">
+                      <a:solidFill>
+                        <a:srgbClr val="D8DEE2"/>
+                      </a:solidFill>
+                      <a:prstDash val="solid"/>
+                      <a:round/>
+                      <a:headEnd type="none" w="med" len="med"/>
+                      <a:tailEnd type="none" w="med" len="med"/>
+                    </a:lnT>
+                    <a:lnB w="6350" cap="flat" cmpd="sng" algn="ctr">
+                      <a:solidFill>
+                        <a:srgbClr val="D8DEE2"/>
+                      </a:solidFill>
+                      <a:prstDash val="solid"/>
+                      <a:round/>
+                      <a:headEnd type="none" w="med" len="med"/>
+                      <a:tailEnd type="none" w="med" len="med"/>
+                    </a:lnB>
+                  </a:tcPr>
+                </a:tc>
+                <a:tc>
+                  <a:txBody>
+                    <a:bodyPr/>
+                    <a:lstStyle/>
+                    <a:p>
+                      <a:pPr indent="0" marL="0">
+                        <a:buNone/>
+                      </a:pPr>
+                      <a:r>
+                        <a:rPr lang="en-US" sz="1000" dirty="0">
+                          <a:solidFill>
+                            <a:srgbClr val="3C4A52"/>
+                          </a:solidFill>
+                          <a:latin typeface="맑은 고딕" pitchFamily="34" charset="0"/>
+                          <a:ea typeface="맑은 고딕" pitchFamily="34" charset="-122"/>
+                          <a:cs typeface="맑은 고딕" pitchFamily="34" charset="-120"/>
+                        </a:rPr>
+                        <a:t>높은 부하 중 대표 서버가 죽어도 서비스가 계속 유지되는지 확인</a:t>
+                      </a:r>
+                      <a:endParaRPr lang="en-US" sz="1000" dirty="0">
+                        <a:latin typeface="맑은 고딕" charset="0"/>
+                        <a:ea typeface="맑은 고딕" charset="0"/>
+                        <a:cs typeface="맑은 고딕" charset="0"/>
+                      </a:endParaRPr>
+                    </a:p>
+                  </a:txBody>
+                  <a:tcPr marL="88900" marR="88900" marT="38100" marB="38100" anchor="ctr">
+                    <a:lnL w="6350" cap="flat" cmpd="sng" algn="ctr">
+                      <a:solidFill>
+                        <a:srgbClr val="D8DEE2"/>
+                      </a:solidFill>
+                      <a:prstDash val="solid"/>
+                      <a:round/>
+                      <a:headEnd type="none" w="med" len="med"/>
+                      <a:tailEnd type="none" w="med" len="med"/>
+                    </a:lnL>
+                    <a:lnR w="6350" cap="flat" cmpd="sng" algn="ctr">
+                      <a:solidFill>
+                        <a:srgbClr val="D8DEE2"/>
+                      </a:solidFill>
+                      <a:prstDash val="solid"/>
+                      <a:round/>
+                      <a:headEnd type="none" w="med" len="med"/>
+                      <a:tailEnd type="none" w="med" len="med"/>
+                    </a:lnR>
+                    <a:lnT w="6350" cap="flat" cmpd="sng" algn="ctr">
+                      <a:solidFill>
+                        <a:srgbClr val="D8DEE2"/>
+                      </a:solidFill>
+                      <a:prstDash val="solid"/>
+                      <a:round/>
+                      <a:headEnd type="none" w="med" len="med"/>
+                      <a:tailEnd type="none" w="med" len="med"/>
+                    </a:lnT>
+                    <a:lnB w="6350" cap="flat" cmpd="sng" algn="ctr">
+                      <a:solidFill>
+                        <a:srgbClr val="D8DEE2"/>
+                      </a:solidFill>
+                      <a:prstDash val="solid"/>
+                      <a:round/>
+                      <a:headEnd type="none" w="med" len="med"/>
+                      <a:tailEnd type="none" w="med" len="med"/>
+                    </a:lnB>
+                  </a:tcPr>
+                </a:tc>
+                <a:tc>
+                  <a:txBody>
+                    <a:bodyPr/>
+                    <a:lstStyle/>
+                    <a:p>
+                      <a:pPr indent="0" marL="0">
+                        <a:buNone/>
+                      </a:pPr>
+                      <a:r>
+                        <a:rPr lang="en-US" sz="1000" b="1" dirty="0">
+                          <a:solidFill>
+                            <a:srgbClr val="2F6B54"/>
+                          </a:solidFill>
+                          <a:latin typeface="맑은 고딕" pitchFamily="34" charset="0"/>
+                          <a:ea typeface="맑은 고딕" pitchFamily="34" charset="-122"/>
+                          <a:cs typeface="맑은 고딕" pitchFamily="34" charset="-120"/>
+                        </a:rPr>
+                        <a:t>PASS · 0.107초 만에 복구</a:t>
+                      </a:r>
+                      <a:endParaRPr lang="en-US" sz="1000" dirty="0">
+                        <a:latin typeface="맑은 고딕" charset="0"/>
+                        <a:ea typeface="맑은 고딕" charset="0"/>
+                        <a:cs typeface="맑은 고딕" charset="0"/>
+                      </a:endParaRPr>
+                    </a:p>
+                  </a:txBody>
+                  <a:tcPr marL="88900" marR="88900" marT="38100" marB="38100" anchor="ctr">
+                    <a:lnL w="6350" cap="flat" cmpd="sng" algn="ctr">
+                      <a:solidFill>
+                        <a:srgbClr val="D8DEE2"/>
+                      </a:solidFill>
+                      <a:prstDash val="solid"/>
+                      <a:round/>
+                      <a:headEnd type="none" w="med" len="med"/>
+                      <a:tailEnd type="none" w="med" len="med"/>
+                    </a:lnL>
+                    <a:lnR w="6350" cap="flat" cmpd="sng" algn="ctr">
+                      <a:solidFill>
+                        <a:srgbClr val="D8DEE2"/>
+                      </a:solidFill>
+                      <a:prstDash val="solid"/>
+                      <a:round/>
+                      <a:headEnd type="none" w="med" len="med"/>
+                      <a:tailEnd type="none" w="med" len="med"/>
+                    </a:lnR>
+                    <a:lnT w="6350" cap="flat" cmpd="sng" algn="ctr">
+                      <a:solidFill>
+                        <a:srgbClr val="D8DEE2"/>
+                      </a:solidFill>
+                      <a:prstDash val="solid"/>
+                      <a:round/>
+                      <a:headEnd type="none" w="med" len="med"/>
+                      <a:tailEnd type="none" w="med" len="med"/>
+                    </a:lnT>
+                    <a:lnB w="6350" cap="flat" cmpd="sng" algn="ctr">
+                      <a:solidFill>
+                        <a:srgbClr val="D8DEE2"/>
+                      </a:solidFill>
+                      <a:prstDash val="solid"/>
+                      <a:round/>
+                      <a:headEnd type="none" w="med" len="med"/>
+                      <a:tailEnd type="none" w="med" len="med"/>
+                    </a:lnB>
+                  </a:tcPr>
+                </a:tc>
+              </a:tr>
+              <a:tr h="301752">
+                <a:tc>
+                  <a:txBody>
+                    <a:bodyPr/>
+                    <a:lstStyle/>
+                    <a:p>
+                      <a:pPr algn="ctr" indent="0" marL="0">
+                        <a:buNone/>
+                      </a:pPr>
+                      <a:r>
+                        <a:rPr lang="en-US" sz="1050" b="1" dirty="0">
+                          <a:solidFill>
+                            <a:srgbClr val="1B2429"/>
+                          </a:solidFill>
+                          <a:latin typeface="맑은 고딕" pitchFamily="34" charset="0"/>
+                          <a:ea typeface="맑은 고딕" pitchFamily="34" charset="-122"/>
+                          <a:cs typeface="맑은 고딕" pitchFamily="34" charset="-120"/>
+                        </a:rPr>
+                        <a:t>E7</a:t>
+                      </a:r>
+                      <a:endParaRPr lang="en-US" sz="1050" dirty="0">
+                        <a:latin typeface="맑은 고딕" charset="0"/>
+                        <a:ea typeface="맑은 고딕" charset="0"/>
+                        <a:cs typeface="맑은 고딕" charset="0"/>
+                      </a:endParaRPr>
+                    </a:p>
+                  </a:txBody>
+                  <a:tcPr marL="88900" marR="88900" marT="38100" marB="38100" anchor="ctr">
+                    <a:lnL w="6350" cap="flat" cmpd="sng" algn="ctr">
+                      <a:solidFill>
+                        <a:srgbClr val="D8DEE2"/>
+                      </a:solidFill>
+                      <a:prstDash val="solid"/>
+                      <a:round/>
+                      <a:headEnd type="none" w="med" len="med"/>
+                      <a:tailEnd type="none" w="med" len="med"/>
+                    </a:lnL>
+                    <a:lnR w="6350" cap="flat" cmpd="sng" algn="ctr">
+                      <a:solidFill>
+                        <a:srgbClr val="D8DEE2"/>
+                      </a:solidFill>
+                      <a:prstDash val="solid"/>
+                      <a:round/>
+                      <a:headEnd type="none" w="med" len="med"/>
+                      <a:tailEnd type="none" w="med" len="med"/>
+                    </a:lnR>
+                    <a:lnT w="6350" cap="flat" cmpd="sng" algn="ctr">
+                      <a:solidFill>
+                        <a:srgbClr val="D8DEE2"/>
+                      </a:solidFill>
+                      <a:prstDash val="solid"/>
+                      <a:round/>
+                      <a:headEnd type="none" w="med" len="med"/>
+                      <a:tailEnd type="none" w="med" len="med"/>
+                    </a:lnT>
+                    <a:lnB w="6350" cap="flat" cmpd="sng" algn="ctr">
+                      <a:solidFill>
+                        <a:srgbClr val="D8DEE2"/>
+                      </a:solidFill>
+                      <a:prstDash val="solid"/>
+                      <a:round/>
+                      <a:headEnd type="none" w="med" len="med"/>
+                      <a:tailEnd type="none" w="med" len="med"/>
+                    </a:lnB>
+                  </a:tcPr>
+                </a:tc>
+                <a:tc>
+                  <a:txBody>
+                    <a:bodyPr/>
+                    <a:lstStyle/>
+                    <a:p>
+                      <a:pPr indent="0" marL="0">
+                        <a:buNone/>
+                      </a:pPr>
+                      <a:r>
+                        <a:rPr lang="en-US" sz="1000" dirty="0">
+                          <a:solidFill>
+                            <a:srgbClr val="3C4A52"/>
+                          </a:solidFill>
+                          <a:latin typeface="맑은 고딕" pitchFamily="34" charset="0"/>
+                          <a:ea typeface="맑은 고딕" pitchFamily="34" charset="-122"/>
+                          <a:cs typeface="맑은 고딕" pitchFamily="34" charset="-120"/>
+                        </a:rPr>
+                        <a:t>대표 서버가 멈췄다가 다시 살아나도 잘못된 처리가 발생하지 않는지 확인</a:t>
+                      </a:r>
+                      <a:endParaRPr lang="en-US" sz="1000" dirty="0">
+                        <a:latin typeface="맑은 고딕" charset="0"/>
+                        <a:ea typeface="맑은 고딕" charset="0"/>
+                        <a:cs typeface="맑은 고딕" charset="0"/>
+                      </a:endParaRPr>
+                    </a:p>
+                  </a:txBody>
+                  <a:tcPr marL="88900" marR="88900" marT="38100" marB="38100" anchor="ctr">
+                    <a:lnL w="6350" cap="flat" cmpd="sng" algn="ctr">
+                      <a:solidFill>
+                        <a:srgbClr val="D8DEE2"/>
+                      </a:solidFill>
+                      <a:prstDash val="solid"/>
+                      <a:round/>
+                      <a:headEnd type="none" w="med" len="med"/>
+                      <a:tailEnd type="none" w="med" len="med"/>
+                    </a:lnL>
+                    <a:lnR w="6350" cap="flat" cmpd="sng" algn="ctr">
+                      <a:solidFill>
+                        <a:srgbClr val="D8DEE2"/>
+                      </a:solidFill>
+                      <a:prstDash val="solid"/>
+                      <a:round/>
+                      <a:headEnd type="none" w="med" len="med"/>
+                      <a:tailEnd type="none" w="med" len="med"/>
+                    </a:lnR>
+                    <a:lnT w="6350" cap="flat" cmpd="sng" algn="ctr">
+                      <a:solidFill>
+                        <a:srgbClr val="D8DEE2"/>
+                      </a:solidFill>
+                      <a:prstDash val="solid"/>
+                      <a:round/>
+                      <a:headEnd type="none" w="med" len="med"/>
+                      <a:tailEnd type="none" w="med" len="med"/>
+                    </a:lnT>
+                    <a:lnB w="6350" cap="flat" cmpd="sng" algn="ctr">
+                      <a:solidFill>
+                        <a:srgbClr val="D8DEE2"/>
+                      </a:solidFill>
+                      <a:prstDash val="solid"/>
+                      <a:round/>
+                      <a:headEnd type="none" w="med" len="med"/>
+                      <a:tailEnd type="none" w="med" len="med"/>
+                    </a:lnB>
+                  </a:tcPr>
+                </a:tc>
+                <a:tc>
+                  <a:txBody>
+                    <a:bodyPr/>
+                    <a:lstStyle/>
+                    <a:p>
+                      <a:pPr indent="0" marL="0">
+                        <a:buNone/>
+                      </a:pPr>
+                      <a:r>
+                        <a:rPr lang="en-US" sz="1000" b="1" dirty="0">
+                          <a:solidFill>
+                            <a:srgbClr val="2F6B54"/>
+                          </a:solidFill>
+                          <a:latin typeface="맑은 고딕" pitchFamily="34" charset="0"/>
+                          <a:ea typeface="맑은 고딕" pitchFamily="34" charset="-122"/>
+                          <a:cs typeface="맑은 고딕" pitchFamily="34" charset="-120"/>
+                        </a:rPr>
+                        <a:t>PASS · 약 10초 만에 복구, 오류 0건</a:t>
+                      </a:r>
+                      <a:endParaRPr lang="en-US" sz="1000" dirty="0">
+                        <a:latin typeface="맑은 고딕" charset="0"/>
+                        <a:ea typeface="맑은 고딕" charset="0"/>
+                        <a:cs typeface="맑은 고딕" charset="0"/>
+                      </a:endParaRPr>
+                    </a:p>
+                  </a:txBody>
+                  <a:tcPr marL="88900" marR="88900" marT="38100" marB="38100" anchor="ctr">
+                    <a:lnL w="6350" cap="flat" cmpd="sng" algn="ctr">
+                      <a:solidFill>
+                        <a:srgbClr val="D8DEE2"/>
+                      </a:solidFill>
+                      <a:prstDash val="solid"/>
+                      <a:round/>
+                      <a:headEnd type="none" w="med" len="med"/>
+                      <a:tailEnd type="none" w="med" len="med"/>
+                    </a:lnL>
+                    <a:lnR w="6350" cap="flat" cmpd="sng" algn="ctr">
+                      <a:solidFill>
+                        <a:srgbClr val="D8DEE2"/>
+                      </a:solidFill>
+                      <a:prstDash val="solid"/>
+                      <a:round/>
+                      <a:headEnd type="none" w="med" len="med"/>
+                      <a:tailEnd type="none" w="med" len="med"/>
+                    </a:lnR>
+                    <a:lnT w="6350" cap="flat" cmpd="sng" algn="ctr">
+                      <a:solidFill>
+                        <a:srgbClr val="D8DEE2"/>
+                      </a:solidFill>
+                      <a:prstDash val="solid"/>
+                      <a:round/>
+                      <a:headEnd type="none" w="med" len="med"/>
+                      <a:tailEnd type="none" w="med" len="med"/>
+                    </a:lnT>
+                    <a:lnB w="6350" cap="flat" cmpd="sng" algn="ctr">
+                      <a:solidFill>
+                        <a:srgbClr val="D8DEE2"/>
+                      </a:solidFill>
+                      <a:prstDash val="solid"/>
+                      <a:round/>
+                      <a:headEnd type="none" w="med" len="med"/>
+                      <a:tailEnd type="none" w="med" len="med"/>
+                    </a:lnB>
+                  </a:tcPr>
+                </a:tc>
+              </a:tr>
+              <a:tr h="301752">
+                <a:tc>
+                  <a:txBody>
+                    <a:bodyPr/>
+                    <a:lstStyle/>
+                    <a:p>
+                      <a:pPr algn="ctr" indent="0" marL="0">
+                        <a:buNone/>
+                      </a:pPr>
+                      <a:r>
+                        <a:rPr lang="en-US" sz="1050" b="1" dirty="0">
+                          <a:solidFill>
+                            <a:srgbClr val="1B2429"/>
+                          </a:solidFill>
+                          <a:latin typeface="맑은 고딕" pitchFamily="34" charset="0"/>
+                          <a:ea typeface="맑은 고딕" pitchFamily="34" charset="-122"/>
+                          <a:cs typeface="맑은 고딕" pitchFamily="34" charset="-120"/>
+                        </a:rPr>
+                        <a:t>E8</a:t>
+                      </a:r>
+                      <a:endParaRPr lang="en-US" sz="1050" dirty="0">
+                        <a:latin typeface="맑은 고딕" charset="0"/>
+                        <a:ea typeface="맑은 고딕" charset="0"/>
+                        <a:cs typeface="맑은 고딕" charset="0"/>
+                      </a:endParaRPr>
+                    </a:p>
+                  </a:txBody>
+                  <a:tcPr marL="88900" marR="88900" marT="38100" marB="38100" anchor="ctr">
+                    <a:lnL w="6350" cap="flat" cmpd="sng" algn="ctr">
+                      <a:solidFill>
+                        <a:srgbClr val="D8DEE2"/>
+                      </a:solidFill>
+                      <a:prstDash val="solid"/>
+                      <a:round/>
+                      <a:headEnd type="none" w="med" len="med"/>
+                      <a:tailEnd type="none" w="med" len="med"/>
+                    </a:lnL>
+                    <a:lnR w="6350" cap="flat" cmpd="sng" algn="ctr">
+                      <a:solidFill>
+                        <a:srgbClr val="D8DEE2"/>
+                      </a:solidFill>
+                      <a:prstDash val="solid"/>
+                      <a:round/>
+                      <a:headEnd type="none" w="med" len="med"/>
+                      <a:tailEnd type="none" w="med" len="med"/>
+                    </a:lnR>
+                    <a:lnT w="6350" cap="flat" cmpd="sng" algn="ctr">
+                      <a:solidFill>
+                        <a:srgbClr val="D8DEE2"/>
+                      </a:solidFill>
+                      <a:prstDash val="solid"/>
+                      <a:round/>
+                      <a:headEnd type="none" w="med" len="med"/>
+                      <a:tailEnd type="none" w="med" len="med"/>
+                    </a:lnT>
+                    <a:lnB w="6350" cap="flat" cmpd="sng" algn="ctr">
+                      <a:solidFill>
+                        <a:srgbClr val="D8DEE2"/>
+                      </a:solidFill>
+                      <a:prstDash val="solid"/>
+                      <a:round/>
+                      <a:headEnd type="none" w="med" len="med"/>
+                      <a:tailEnd type="none" w="med" len="med"/>
+                    </a:lnB>
+                  </a:tcPr>
+                </a:tc>
+                <a:tc>
+                  <a:txBody>
+                    <a:bodyPr/>
+                    <a:lstStyle/>
+                    <a:p>
+                      <a:pPr indent="0" marL="0">
+                        <a:buNone/>
+                      </a:pPr>
+                      <a:r>
+                        <a:rPr lang="en-US" sz="1000" dirty="0">
+                          <a:solidFill>
+                            <a:srgbClr val="3C4A52"/>
+                          </a:solidFill>
+                          <a:latin typeface="맑은 고딕" pitchFamily="34" charset="0"/>
+                          <a:ea typeface="맑은 고딕" pitchFamily="34" charset="-122"/>
+                          <a:cs typeface="맑은 고딕" pitchFamily="34" charset="-120"/>
+                        </a:rPr>
+                        <a:t>앱 내부에 오류를 일부러 발생시켜도 정상 복구되는지 확인</a:t>
+                      </a:r>
+                      <a:endParaRPr lang="en-US" sz="1000" dirty="0">
+                        <a:latin typeface="맑은 고딕" charset="0"/>
+                        <a:ea typeface="맑은 고딕" charset="0"/>
+                        <a:cs typeface="맑은 고딕" charset="0"/>
+                      </a:endParaRPr>
+                    </a:p>
+                  </a:txBody>
+                  <a:tcPr marL="88900" marR="88900" marT="38100" marB="38100" anchor="ctr">
+                    <a:lnL w="6350" cap="flat" cmpd="sng" algn="ctr">
+                      <a:solidFill>
+                        <a:srgbClr val="D8DEE2"/>
+                      </a:solidFill>
+                      <a:prstDash val="solid"/>
+                      <a:round/>
+                      <a:headEnd type="none" w="med" len="med"/>
+                      <a:tailEnd type="none" w="med" len="med"/>
+                    </a:lnL>
+                    <a:lnR w="6350" cap="flat" cmpd="sng" algn="ctr">
+                      <a:solidFill>
+                        <a:srgbClr val="D8DEE2"/>
+                      </a:solidFill>
+                      <a:prstDash val="solid"/>
+                      <a:round/>
+                      <a:headEnd type="none" w="med" len="med"/>
+                      <a:tailEnd type="none" w="med" len="med"/>
+                    </a:lnR>
+                    <a:lnT w="6350" cap="flat" cmpd="sng" algn="ctr">
+                      <a:solidFill>
+                        <a:srgbClr val="D8DEE2"/>
+                      </a:solidFill>
+                      <a:prstDash val="solid"/>
+                      <a:round/>
+                      <a:headEnd type="none" w="med" len="med"/>
+                      <a:tailEnd type="none" w="med" len="med"/>
+                    </a:lnT>
+                    <a:lnB w="6350" cap="flat" cmpd="sng" algn="ctr">
+                      <a:solidFill>
+                        <a:srgbClr val="D8DEE2"/>
+                      </a:solidFill>
+                      <a:prstDash val="solid"/>
+                      <a:round/>
+                      <a:headEnd type="none" w="med" len="med"/>
+                      <a:tailEnd type="none" w="med" len="med"/>
+                    </a:lnB>
+                  </a:tcPr>
+                </a:tc>
+                <a:tc>
+                  <a:txBody>
+                    <a:bodyPr/>
+                    <a:lstStyle/>
+                    <a:p>
+                      <a:pPr indent="0" marL="0">
+                        <a:buNone/>
+                      </a:pPr>
+                      <a:r>
+                        <a:rPr lang="en-US" sz="1000" b="1" dirty="0">
+                          <a:solidFill>
+                            <a:srgbClr val="7A8A93"/>
+                          </a:solidFill>
+                          <a:latin typeface="맑은 고딕" pitchFamily="34" charset="0"/>
+                          <a:ea typeface="맑은 고딕" pitchFamily="34" charset="-122"/>
+                          <a:cs typeface="맑은 고딕" pitchFamily="34" charset="-120"/>
+                        </a:rPr>
+                        <a:t>준비 완료 · 라이브 기록 아직 없음</a:t>
+                      </a:r>
+                      <a:endParaRPr lang="en-US" sz="1000" dirty="0">
+                        <a:latin typeface="맑은 고딕" charset="0"/>
+                        <a:ea typeface="맑은 고딕" charset="0"/>
+                        <a:cs typeface="맑은 고딕" charset="0"/>
+                      </a:endParaRPr>
+                    </a:p>
+                  </a:txBody>
+                  <a:tcPr marL="88900" marR="88900" marT="38100" marB="38100" anchor="ctr">
+                    <a:lnL w="6350" cap="flat" cmpd="sng" algn="ctr">
+                      <a:solidFill>
+                        <a:srgbClr val="D8DEE2"/>
+                      </a:solidFill>
+                      <a:prstDash val="solid"/>
+                      <a:round/>
+                      <a:headEnd type="none" w="med" len="med"/>
+                      <a:tailEnd type="none" w="med" len="med"/>
+                    </a:lnL>
+                    <a:lnR w="6350" cap="flat" cmpd="sng" algn="ctr">
+                      <a:solidFill>
+                        <a:srgbClr val="D8DEE2"/>
+                      </a:solidFill>
+                      <a:prstDash val="solid"/>
+                      <a:round/>
+                      <a:headEnd type="none" w="med" len="med"/>
+                      <a:tailEnd type="none" w="med" len="med"/>
+                    </a:lnR>
+                    <a:lnT w="6350" cap="flat" cmpd="sng" algn="ctr">
+                      <a:solidFill>
+                        <a:srgbClr val="D8DEE2"/>
+                      </a:solidFill>
+                      <a:prstDash val="solid"/>
+                      <a:round/>
+                      <a:headEnd type="none" w="med" len="med"/>
+                      <a:tailEnd type="none" w="med" len="med"/>
+                    </a:lnT>
+                    <a:lnB w="6350" cap="flat" cmpd="sng" algn="ctr">
+                      <a:solidFill>
+                        <a:srgbClr val="D8DEE2"/>
+                      </a:solidFill>
+                      <a:prstDash val="solid"/>
+                      <a:round/>
+                      <a:headEnd type="none" w="med" len="med"/>
+                      <a:tailEnd type="none" w="med" len="med"/>
+                    </a:lnB>
+                  </a:tcPr>
+                </a:tc>
+              </a:tr>
+              <a:tr h="301752">
+                <a:tc>
+                  <a:txBody>
+                    <a:bodyPr/>
+                    <a:lstStyle/>
+                    <a:p>
+                      <a:pPr algn="ctr" indent="0" marL="0">
+                        <a:buNone/>
+                      </a:pPr>
+                      <a:r>
+                        <a:rPr lang="en-US" sz="1050" b="1" dirty="0">
+                          <a:solidFill>
+                            <a:srgbClr val="1B2429"/>
+                          </a:solidFill>
+                          <a:latin typeface="맑은 고딕" pitchFamily="34" charset="0"/>
+                          <a:ea typeface="맑은 고딕" pitchFamily="34" charset="-122"/>
+                          <a:cs typeface="맑은 고딕" pitchFamily="34" charset="-120"/>
+                        </a:rPr>
+                        <a:t>E9</a:t>
+                      </a:r>
+                      <a:endParaRPr lang="en-US" sz="1050" dirty="0">
+                        <a:latin typeface="맑은 고딕" charset="0"/>
+                        <a:ea typeface="맑은 고딕" charset="0"/>
+                        <a:cs typeface="맑은 고딕" charset="0"/>
+                      </a:endParaRPr>
+                    </a:p>
+                  </a:txBody>
+                  <a:tcPr marL="88900" marR="88900" marT="38100" marB="38100" anchor="ctr">
+                    <a:lnL w="6350" cap="flat" cmpd="sng" algn="ctr">
+                      <a:solidFill>
+                        <a:srgbClr val="D8DEE2"/>
+                      </a:solidFill>
+                      <a:prstDash val="solid"/>
+                      <a:round/>
+                      <a:headEnd type="none" w="med" len="med"/>
+                      <a:tailEnd type="none" w="med" len="med"/>
+                    </a:lnL>
+                    <a:lnR w="6350" cap="flat" cmpd="sng" algn="ctr">
+                      <a:solidFill>
+                        <a:srgbClr val="D8DEE2"/>
+                      </a:solidFill>
+                      <a:prstDash val="solid"/>
+                      <a:round/>
+                      <a:headEnd type="none" w="med" len="med"/>
+                      <a:tailEnd type="none" w="med" len="med"/>
+                    </a:lnR>
+                    <a:lnT w="6350" cap="flat" cmpd="sng" algn="ctr">
+                      <a:solidFill>
+                        <a:srgbClr val="D8DEE2"/>
+                      </a:solidFill>
+                      <a:prstDash val="solid"/>
+                      <a:round/>
+                      <a:headEnd type="none" w="med" len="med"/>
+                      <a:tailEnd type="none" w="med" len="med"/>
+                    </a:lnT>
+                    <a:lnB w="6350" cap="flat" cmpd="sng" algn="ctr">
+                      <a:solidFill>
+                        <a:srgbClr val="D8DEE2"/>
+                      </a:solidFill>
+                      <a:prstDash val="solid"/>
+                      <a:round/>
+                      <a:headEnd type="none" w="med" len="med"/>
+                      <a:tailEnd type="none" w="med" len="med"/>
+                    </a:lnB>
+                  </a:tcPr>
+                </a:tc>
+                <a:tc>
+                  <a:txBody>
+                    <a:bodyPr/>
+                    <a:lstStyle/>
+                    <a:p>
+                      <a:pPr indent="0" marL="0">
+                        <a:buNone/>
+                      </a:pPr>
+                      <a:r>
+                        <a:rPr lang="en-US" sz="1000" dirty="0">
+                          <a:solidFill>
+                            <a:srgbClr val="3C4A52"/>
+                          </a:solidFill>
+                          <a:latin typeface="맑은 고딕" pitchFamily="34" charset="0"/>
+                          <a:ea typeface="맑은 고딕" pitchFamily="34" charset="-122"/>
+                          <a:cs typeface="맑은 고딕" pitchFamily="34" charset="-120"/>
+                        </a:rPr>
+                        <a:t>처리 완료 후 응답만 끊겨도 중복 처리가 발생하지 않는지 확인</a:t>
+                      </a:r>
+                      <a:endParaRPr lang="en-US" sz="1000" dirty="0">
+                        <a:latin typeface="맑은 고딕" charset="0"/>
+                        <a:ea typeface="맑은 고딕" charset="0"/>
+                        <a:cs typeface="맑은 고딕" charset="0"/>
+                      </a:endParaRPr>
+                    </a:p>
+                  </a:txBody>
+                  <a:tcPr marL="88900" marR="88900" marT="38100" marB="38100" anchor="ctr">
+                    <a:lnL w="6350" cap="flat" cmpd="sng" algn="ctr">
+                      <a:solidFill>
+                        <a:srgbClr val="D8DEE2"/>
+                      </a:solidFill>
+                      <a:prstDash val="solid"/>
+                      <a:round/>
+                      <a:headEnd type="none" w="med" len="med"/>
+                      <a:tailEnd type="none" w="med" len="med"/>
+                    </a:lnL>
+                    <a:lnR w="6350" cap="flat" cmpd="sng" algn="ctr">
+                      <a:solidFill>
+                        <a:srgbClr val="D8DEE2"/>
+                      </a:solidFill>
+                      <a:prstDash val="solid"/>
+                      <a:round/>
+                      <a:headEnd type="none" w="med" len="med"/>
+                      <a:tailEnd type="none" w="med" len="med"/>
+                    </a:lnR>
+                    <a:lnT w="6350" cap="flat" cmpd="sng" algn="ctr">
+                      <a:solidFill>
+                        <a:srgbClr val="D8DEE2"/>
+                      </a:solidFill>
+                      <a:prstDash val="solid"/>
+                      <a:round/>
+                      <a:headEnd type="none" w="med" len="med"/>
+                      <a:tailEnd type="none" w="med" len="med"/>
+                    </a:lnT>
+                    <a:lnB w="6350" cap="flat" cmpd="sng" algn="ctr">
+                      <a:solidFill>
+                        <a:srgbClr val="D8DEE2"/>
+                      </a:solidFill>
+                      <a:prstDash val="solid"/>
+                      <a:round/>
+                      <a:headEnd type="none" w="med" len="med"/>
+                      <a:tailEnd type="none" w="med" len="med"/>
+                    </a:lnB>
+                  </a:tcPr>
+                </a:tc>
+                <a:tc>
+                  <a:txBody>
+                    <a:bodyPr/>
+                    <a:lstStyle/>
+                    <a:p>
+                      <a:pPr indent="0" marL="0">
+                        <a:buNone/>
+                      </a:pPr>
+                      <a:r>
+                        <a:rPr lang="en-US" sz="1000" b="1" dirty="0">
+                          <a:solidFill>
+                            <a:srgbClr val="2F6B54"/>
+                          </a:solidFill>
+                          <a:latin typeface="맑은 고딕" pitchFamily="34" charset="0"/>
+                          <a:ea typeface="맑은 고딕" pitchFamily="34" charset="-122"/>
+                          <a:cs typeface="맑은 고딕" pitchFamily="34" charset="-120"/>
+                        </a:rPr>
+                        <a:t>PASS · 다만 증거 신뢰도는 낮음</a:t>
+                      </a:r>
+                      <a:endParaRPr lang="en-US" sz="1000" dirty="0">
+                        <a:latin typeface="맑은 고딕" charset="0"/>
+                        <a:ea typeface="맑은 고딕" charset="0"/>
+                        <a:cs typeface="맑은 고딕" charset="0"/>
+                      </a:endParaRPr>
+                    </a:p>
+                  </a:txBody>
+                  <a:tcPr marL="88900" marR="88900" marT="38100" marB="38100" anchor="ctr">
+                    <a:lnL w="6350" cap="flat" cmpd="sng" algn="ctr">
+                      <a:solidFill>
+                        <a:srgbClr val="D8DEE2"/>
+                      </a:solidFill>
+                      <a:prstDash val="solid"/>
+                      <a:round/>
+                      <a:headEnd type="none" w="med" len="med"/>
+                      <a:tailEnd type="none" w="med" len="med"/>
+                    </a:lnL>
+                    <a:lnR w="6350" cap="flat" cmpd="sng" algn="ctr">
+                      <a:solidFill>
+                        <a:srgbClr val="D8DEE2"/>
+                      </a:solidFill>
+                      <a:prstDash val="solid"/>
+                      <a:round/>
+                      <a:headEnd type="none" w="med" len="med"/>
+                      <a:tailEnd type="none" w="med" len="med"/>
+                    </a:lnR>
+                    <a:lnT w="6350" cap="flat" cmpd="sng" algn="ctr">
+                      <a:solidFill>
+                        <a:srgbClr val="D8DEE2"/>
+                      </a:solidFill>
+                      <a:prstDash val="solid"/>
+                      <a:round/>
+                      <a:headEnd type="none" w="med" len="med"/>
+                      <a:tailEnd type="none" w="med" len="med"/>
+                    </a:lnT>
+                    <a:lnB w="6350" cap="flat" cmpd="sng" algn="ctr">
+                      <a:solidFill>
+                        <a:srgbClr val="D8DEE2"/>
+                      </a:solidFill>
+                      <a:prstDash val="solid"/>
+                      <a:round/>
+                      <a:headEnd type="none" w="med" len="med"/>
+                      <a:tailEnd type="none" w="med" len="med"/>
+                    </a:lnB>
+                  </a:tcPr>
+                </a:tc>
+              </a:tr>
+              <a:tr h="301752">
+                <a:tc>
+                  <a:txBody>
+                    <a:bodyPr/>
+                    <a:lstStyle/>
+                    <a:p>
+                      <a:pPr algn="ctr" indent="0" marL="0">
+                        <a:buNone/>
+                      </a:pPr>
+                      <a:r>
+                        <a:rPr lang="en-US" sz="1050" b="1" dirty="0">
+                          <a:solidFill>
+                            <a:srgbClr val="1B2429"/>
+                          </a:solidFill>
+                          <a:latin typeface="맑은 고딕" pitchFamily="34" charset="0"/>
+                          <a:ea typeface="맑은 고딕" pitchFamily="34" charset="-122"/>
+                          <a:cs typeface="맑은 고딕" pitchFamily="34" charset="-120"/>
+                        </a:rPr>
+                        <a:t>E10</a:t>
+                      </a:r>
+                      <a:endParaRPr lang="en-US" sz="1050" dirty="0">
+                        <a:latin typeface="맑은 고딕" charset="0"/>
+                        <a:ea typeface="맑은 고딕" charset="0"/>
+                        <a:cs typeface="맑은 고딕" charset="0"/>
+                      </a:endParaRPr>
+                    </a:p>
+                  </a:txBody>
+                  <a:tcPr marL="88900" marR="88900" marT="38100" marB="38100" anchor="ctr">
+                    <a:lnL w="6350" cap="flat" cmpd="sng" algn="ctr">
+                      <a:solidFill>
+                        <a:srgbClr val="D8DEE2"/>
+                      </a:solidFill>
+                      <a:prstDash val="solid"/>
+                      <a:round/>
+                      <a:headEnd type="none" w="med" len="med"/>
+                      <a:tailEnd type="none" w="med" len="med"/>
+                    </a:lnL>
+                    <a:lnR w="6350" cap="flat" cmpd="sng" algn="ctr">
+                      <a:solidFill>
+                        <a:srgbClr val="D8DEE2"/>
+                      </a:solidFill>
+                      <a:prstDash val="solid"/>
+                      <a:round/>
+                      <a:headEnd type="none" w="med" len="med"/>
+                      <a:tailEnd type="none" w="med" len="med"/>
+                    </a:lnR>
+                    <a:lnT w="6350" cap="flat" cmpd="sng" algn="ctr">
+                      <a:solidFill>
+                        <a:srgbClr val="D8DEE2"/>
+                      </a:solidFill>
+                      <a:prstDash val="solid"/>
+                      <a:round/>
+                      <a:headEnd type="none" w="med" len="med"/>
+                      <a:tailEnd type="none" w="med" len="med"/>
+                    </a:lnT>
+                    <a:lnB w="6350" cap="flat" cmpd="sng" algn="ctr">
+                      <a:solidFill>
+                        <a:srgbClr val="D8DEE2"/>
+                      </a:solidFill>
+                      <a:prstDash val="solid"/>
+                      <a:round/>
+                      <a:headEnd type="none" w="med" len="med"/>
+                      <a:tailEnd type="none" w="med" len="med"/>
+                    </a:lnB>
+                  </a:tcPr>
+                </a:tc>
+                <a:tc>
+                  <a:txBody>
+                    <a:bodyPr/>
+                    <a:lstStyle/>
+                    <a:p>
+                      <a:pPr indent="0" marL="0">
+                        <a:buNone/>
+                      </a:pPr>
+                      <a:r>
+                        <a:rPr lang="en-US" sz="1000" dirty="0">
+                          <a:solidFill>
+                            <a:srgbClr val="3C4A52"/>
+                          </a:solidFill>
+                          <a:latin typeface="맑은 고딕" pitchFamily="34" charset="0"/>
+                          <a:ea typeface="맑은 고딕" pitchFamily="34" charset="-122"/>
+                          <a:cs typeface="맑은 고딕" pitchFamily="34" charset="-120"/>
+                        </a:rPr>
+                        <a:t>실제 네트워크 장애를 만들어도 데이터 오류 없이 원인을 확인할 수 있는지 검증</a:t>
+                      </a:r>
+                      <a:endParaRPr lang="en-US" sz="1000" dirty="0">
+                        <a:latin typeface="맑은 고딕" charset="0"/>
+                        <a:ea typeface="맑은 고딕" charset="0"/>
+                        <a:cs typeface="맑은 고딕" charset="0"/>
+                      </a:endParaRPr>
+                    </a:p>
+                  </a:txBody>
+                  <a:tcPr marL="88900" marR="88900" marT="38100" marB="38100" anchor="ctr">
+                    <a:lnL w="6350" cap="flat" cmpd="sng" algn="ctr">
+                      <a:solidFill>
+                        <a:srgbClr val="D8DEE2"/>
+                      </a:solidFill>
+                      <a:prstDash val="solid"/>
+                      <a:round/>
+                      <a:headEnd type="none" w="med" len="med"/>
+                      <a:tailEnd type="none" w="med" len="med"/>
+                    </a:lnL>
+                    <a:lnR w="6350" cap="flat" cmpd="sng" algn="ctr">
+                      <a:solidFill>
+                        <a:srgbClr val="D8DEE2"/>
+                      </a:solidFill>
+                      <a:prstDash val="solid"/>
+                      <a:round/>
+                      <a:headEnd type="none" w="med" len="med"/>
+                      <a:tailEnd type="none" w="med" len="med"/>
+                    </a:lnR>
+                    <a:lnT w="6350" cap="flat" cmpd="sng" algn="ctr">
+                      <a:solidFill>
+                        <a:srgbClr val="D8DEE2"/>
+                      </a:solidFill>
+                      <a:prstDash val="solid"/>
+                      <a:round/>
+                      <a:headEnd type="none" w="med" len="med"/>
+                      <a:tailEnd type="none" w="med" len="med"/>
+                    </a:lnT>
+                    <a:lnB w="6350" cap="flat" cmpd="sng" algn="ctr">
+                      <a:solidFill>
+                        <a:srgbClr val="D8DEE2"/>
+                      </a:solidFill>
+                      <a:prstDash val="solid"/>
+                      <a:round/>
+                      <a:headEnd type="none" w="med" len="med"/>
+                      <a:tailEnd type="none" w="med" len="med"/>
+                    </a:lnB>
+                  </a:tcPr>
+                </a:tc>
+                <a:tc>
+                  <a:txBody>
+                    <a:bodyPr/>
+                    <a:lstStyle/>
+                    <a:p>
+                      <a:pPr indent="0" marL="0">
+                        <a:buNone/>
+                      </a:pPr>
+                      <a:r>
+                        <a:rPr lang="en-US" sz="1000" b="1" dirty="0">
+                          <a:solidFill>
+                            <a:srgbClr val="B33A32"/>
+                          </a:solidFill>
+                          <a:latin typeface="맑은 고딕" pitchFamily="34" charset="0"/>
+                          <a:ea typeface="맑은 고딕" pitchFamily="34" charset="-122"/>
+                          <a:cs typeface="맑은 고딕" pitchFamily="34" charset="-120"/>
+                        </a:rPr>
+                        <a:t>미실시 · 09-30 ~ 10-06 목표</a:t>
+                      </a:r>
+                      <a:endParaRPr lang="en-US" sz="1000" dirty="0">
+                        <a:latin typeface="맑은 고딕" charset="0"/>
+                        <a:ea typeface="맑은 고딕" charset="0"/>
+                        <a:cs typeface="맑은 고딕" charset="0"/>
+                      </a:endParaRPr>
+                    </a:p>
+                  </a:txBody>
+                  <a:tcPr marL="88900" marR="88900" marT="38100" marB="38100" anchor="ctr">
+                    <a:lnL w="6350" cap="flat" cmpd="sng" algn="ctr">
+                      <a:solidFill>
+                        <a:srgbClr val="D8DEE2"/>
+                      </a:solidFill>
+                      <a:prstDash val="solid"/>
+                      <a:round/>
+                      <a:headEnd type="none" w="med" len="med"/>
+                      <a:tailEnd type="none" w="med" len="med"/>
+                    </a:lnL>
+                    <a:lnR w="6350" cap="flat" cmpd="sng" algn="ctr">
+                      <a:solidFill>
+                        <a:srgbClr val="D8DEE2"/>
+                      </a:solidFill>
+                      <a:prstDash val="solid"/>
+                      <a:round/>
+                      <a:headEnd type="none" w="med" len="med"/>
+                      <a:tailEnd type="none" w="med" len="med"/>
+                    </a:lnR>
+                    <a:lnT w="6350" cap="flat" cmpd="sng" algn="ctr">
+                      <a:solidFill>
+                        <a:srgbClr val="D8DEE2"/>
+                      </a:solidFill>
+                      <a:prstDash val="solid"/>
+                      <a:round/>
+                      <a:headEnd type="none" w="med" len="med"/>
+                      <a:tailEnd type="none" w="med" len="med"/>
+                    </a:lnT>
+                    <a:lnB w="6350" cap="flat" cmpd="sng" algn="ctr">
+                      <a:solidFill>
+                        <a:srgbClr val="D8DEE2"/>
+                      </a:solidFill>
+                      <a:prstDash val="solid"/>
+                      <a:round/>
+                      <a:headEnd type="none" w="med" len="med"/>
+                      <a:tailEnd type="none" w="med" len="med"/>
+                    </a:lnB>
+                  </a:tcPr>
+                </a:tc>
+              </a:tr>
+            </a:tbl>
+          </a:graphicData>
+        </a:graphic>
+      </p:graphicFrame>
+      <p:sp>
+        <p:nvSpPr>
+          <p:cNvPr id="6" name="Text 3"/>
           <p:cNvSpPr/>
           <p:nvPr/>
         </p:nvSpPr>
         <p:spPr>
           <a:xfrm>
-            <a:off x="566928" y="1627632"/>
-            <a:ext cx="2065264" cy="841248"/>
-          </a:xfrm>
-          <a:prstGeom prst="roundRect">
-            <a:avLst>
-              <a:gd name="adj" fmla="val 5435"/>
-            </a:avLst>
-          </a:prstGeom>
-          <a:solidFill>
-            <a:srgbClr val="E4EDE8"/>
-          </a:solidFill>
-          <a:ln w="9525">
-            <a:solidFill>
-              <a:srgbClr val="D8DEE2"/>
-            </a:solidFill>
-            <a:prstDash val="solid"/>
-          </a:ln>
-        </p:spPr>
-      </p:sp>
-      <p:sp>
-        <p:nvSpPr>
-          <p:cNvPr id="6" name="Text 4"/>
-          <p:cNvSpPr/>
-          <p:nvPr/>
-        </p:nvSpPr>
-        <p:spPr>
-          <a:xfrm>
-            <a:off x="694944" y="1700784"/>
-            <a:ext cx="1809232" cy="256032"/>
-          </a:xfrm>
-          <a:prstGeom prst="rect">
-            <a:avLst/>
-          </a:prstGeom>
-          <a:noFill/>
-          <a:ln/>
-        </p:spPr>
-        <p:txBody>
-          <a:bodyPr wrap="square" lIns="0" tIns="0" rIns="0" bIns="0" rtlCol="0" anchor="ctr"/>
-          <a:lstStyle/>
-          <a:p>
-            <a:pPr indent="0" marL="0">
-              <a:buNone/>
-            </a:pPr>
-            <a:r>
-              <a:rPr lang="en-US" sz="1300" b="1" dirty="0">
-                <a:solidFill>
-                  <a:srgbClr val="1B2429"/>
-                </a:solidFill>
-                <a:latin typeface="맑은 고딕" pitchFamily="34" charset="0"/>
-                <a:ea typeface="맑은 고딕" pitchFamily="34" charset="-122"/>
-                <a:cs typeface="맑은 고딕" pitchFamily="34" charset="-120"/>
-              </a:rPr>
-              <a:t>E1</a:t>
-            </a:r>
-            <a:endParaRPr lang="en-US" sz="1300" dirty="0"/>
-          </a:p>
-        </p:txBody>
-      </p:sp>
-      <p:sp>
-        <p:nvSpPr>
-          <p:cNvPr id="7" name="Text 5"/>
-          <p:cNvSpPr/>
-          <p:nvPr/>
-        </p:nvSpPr>
-        <p:spPr>
-          <a:xfrm>
-            <a:off x="694944" y="1956816"/>
-            <a:ext cx="1809232" cy="237744"/>
-          </a:xfrm>
-          <a:prstGeom prst="rect">
-            <a:avLst/>
-          </a:prstGeom>
-          <a:noFill/>
-          <a:ln/>
-        </p:spPr>
-        <p:txBody>
-          <a:bodyPr wrap="square" lIns="0" tIns="0" rIns="0" bIns="0" rtlCol="0" anchor="ctr"/>
-          <a:lstStyle/>
-          <a:p>
-            <a:pPr indent="0" marL="0">
-              <a:buNone/>
-            </a:pPr>
-            <a:r>
-              <a:rPr lang="en-US" sz="1000" dirty="0">
-                <a:solidFill>
-                  <a:srgbClr val="3C4A52"/>
-                </a:solidFill>
-                <a:latin typeface="맑은 고딕" pitchFamily="34" charset="0"/>
-                <a:ea typeface="맑은 고딕" pitchFamily="34" charset="-122"/>
-                <a:cs typeface="맑은 고딕" pitchFamily="34" charset="-120"/>
-              </a:rPr>
-              <a:t>PG 지연</a:t>
-            </a:r>
-            <a:endParaRPr lang="en-US" sz="1000" dirty="0"/>
-          </a:p>
-        </p:txBody>
-      </p:sp>
-      <p:sp>
-        <p:nvSpPr>
-          <p:cNvPr id="8" name="Text 6"/>
-          <p:cNvSpPr/>
-          <p:nvPr/>
-        </p:nvSpPr>
-        <p:spPr>
-          <a:xfrm>
-            <a:off x="694944" y="2176272"/>
-            <a:ext cx="1809232" cy="237744"/>
-          </a:xfrm>
-          <a:prstGeom prst="rect">
-            <a:avLst/>
-          </a:prstGeom>
-          <a:noFill/>
-          <a:ln/>
-        </p:spPr>
-        <p:txBody>
-          <a:bodyPr wrap="square" lIns="0" tIns="0" rIns="0" bIns="0" rtlCol="0" anchor="ctr"/>
-          <a:lstStyle/>
-          <a:p>
-            <a:pPr indent="0" marL="0">
-              <a:buNone/>
-            </a:pPr>
-            <a:r>
-              <a:rPr lang="en-US" sz="1000" b="1" dirty="0">
-                <a:solidFill>
-                  <a:srgbClr val="2F6B54"/>
-                </a:solidFill>
-                <a:latin typeface="맑은 고딕" pitchFamily="34" charset="0"/>
-                <a:ea typeface="맑은 고딕" pitchFamily="34" charset="-122"/>
-                <a:cs typeface="맑은 고딕" pitchFamily="34" charset="-120"/>
-              </a:rPr>
-              <a:t>PASS</a:t>
-            </a:r>
-            <a:endParaRPr lang="en-US" sz="1000" dirty="0"/>
-          </a:p>
-        </p:txBody>
-      </p:sp>
-      <p:sp>
-        <p:nvSpPr>
-          <p:cNvPr id="9" name="Shape 7"/>
-          <p:cNvSpPr/>
-          <p:nvPr/>
-        </p:nvSpPr>
-        <p:spPr>
-          <a:xfrm>
-            <a:off x="2778496" y="1627632"/>
-            <a:ext cx="2065264" cy="841248"/>
-          </a:xfrm>
-          <a:prstGeom prst="roundRect">
-            <a:avLst>
-              <a:gd name="adj" fmla="val 5435"/>
-            </a:avLst>
-          </a:prstGeom>
-          <a:solidFill>
-            <a:srgbClr val="E4EDE8"/>
-          </a:solidFill>
-          <a:ln w="9525">
-            <a:solidFill>
-              <a:srgbClr val="D8DEE2"/>
-            </a:solidFill>
-            <a:prstDash val="solid"/>
-          </a:ln>
-        </p:spPr>
-      </p:sp>
-      <p:sp>
-        <p:nvSpPr>
-          <p:cNvPr id="10" name="Text 8"/>
-          <p:cNvSpPr/>
-          <p:nvPr/>
-        </p:nvSpPr>
-        <p:spPr>
-          <a:xfrm>
-            <a:off x="2906512" y="1700784"/>
-            <a:ext cx="1809232" cy="256032"/>
-          </a:xfrm>
-          <a:prstGeom prst="rect">
-            <a:avLst/>
-          </a:prstGeom>
-          <a:noFill/>
-          <a:ln/>
-        </p:spPr>
-        <p:txBody>
-          <a:bodyPr wrap="square" lIns="0" tIns="0" rIns="0" bIns="0" rtlCol="0" anchor="ctr"/>
-          <a:lstStyle/>
-          <a:p>
-            <a:pPr indent="0" marL="0">
-              <a:buNone/>
-            </a:pPr>
-            <a:r>
-              <a:rPr lang="en-US" sz="1300" b="1" dirty="0">
-                <a:solidFill>
-                  <a:srgbClr val="1B2429"/>
-                </a:solidFill>
-                <a:latin typeface="맑은 고딕" pitchFamily="34" charset="0"/>
-                <a:ea typeface="맑은 고딕" pitchFamily="34" charset="-122"/>
-                <a:cs typeface="맑은 고딕" pitchFamily="34" charset="-120"/>
-              </a:rPr>
-              <a:t>E2</a:t>
-            </a:r>
-            <a:endParaRPr lang="en-US" sz="1300" dirty="0"/>
-          </a:p>
-        </p:txBody>
-      </p:sp>
-      <p:sp>
-        <p:nvSpPr>
-          <p:cNvPr id="11" name="Text 9"/>
-          <p:cNvSpPr/>
-          <p:nvPr/>
-        </p:nvSpPr>
-        <p:spPr>
-          <a:xfrm>
-            <a:off x="2906512" y="1956816"/>
-            <a:ext cx="1809232" cy="237744"/>
-          </a:xfrm>
-          <a:prstGeom prst="rect">
-            <a:avLst/>
-          </a:prstGeom>
-          <a:noFill/>
-          <a:ln/>
-        </p:spPr>
-        <p:txBody>
-          <a:bodyPr wrap="square" lIns="0" tIns="0" rIns="0" bIns="0" rtlCol="0" anchor="ctr"/>
-          <a:lstStyle/>
-          <a:p>
-            <a:pPr indent="0" marL="0">
-              <a:buNone/>
-            </a:pPr>
-            <a:r>
-              <a:rPr lang="en-US" sz="1000" dirty="0">
-                <a:solidFill>
-                  <a:srgbClr val="3C4A52"/>
-                </a:solidFill>
-                <a:latin typeface="맑은 고딕" pitchFamily="34" charset="0"/>
-                <a:ea typeface="맑은 고딕" pitchFamily="34" charset="-122"/>
-                <a:cs typeface="맑은 고딕" pitchFamily="34" charset="-120"/>
-              </a:rPr>
-              <a:t>DB 단절</a:t>
-            </a:r>
-            <a:endParaRPr lang="en-US" sz="1000" dirty="0"/>
-          </a:p>
-        </p:txBody>
-      </p:sp>
-      <p:sp>
-        <p:nvSpPr>
-          <p:cNvPr id="12" name="Text 10"/>
-          <p:cNvSpPr/>
-          <p:nvPr/>
-        </p:nvSpPr>
-        <p:spPr>
-          <a:xfrm>
-            <a:off x="2906512" y="2176272"/>
-            <a:ext cx="1809232" cy="237744"/>
-          </a:xfrm>
-          <a:prstGeom prst="rect">
-            <a:avLst/>
-          </a:prstGeom>
-          <a:noFill/>
-          <a:ln/>
-        </p:spPr>
-        <p:txBody>
-          <a:bodyPr wrap="square" lIns="0" tIns="0" rIns="0" bIns="0" rtlCol="0" anchor="ctr"/>
-          <a:lstStyle/>
-          <a:p>
-            <a:pPr indent="0" marL="0">
-              <a:buNone/>
-            </a:pPr>
-            <a:r>
-              <a:rPr lang="en-US" sz="1000" b="1" dirty="0">
-                <a:solidFill>
-                  <a:srgbClr val="2F6B54"/>
-                </a:solidFill>
-                <a:latin typeface="맑은 고딕" pitchFamily="34" charset="0"/>
-                <a:ea typeface="맑은 고딕" pitchFamily="34" charset="-122"/>
-                <a:cs typeface="맑은 고딕" pitchFamily="34" charset="-120"/>
-              </a:rPr>
-              <a:t>PASS</a:t>
-            </a:r>
-            <a:endParaRPr lang="en-US" sz="1000" dirty="0"/>
-          </a:p>
-        </p:txBody>
-      </p:sp>
-      <p:sp>
-        <p:nvSpPr>
-          <p:cNvPr id="13" name="Shape 11"/>
-          <p:cNvSpPr/>
-          <p:nvPr/>
-        </p:nvSpPr>
-        <p:spPr>
-          <a:xfrm>
-            <a:off x="4990064" y="1627632"/>
-            <a:ext cx="2065264" cy="841248"/>
-          </a:xfrm>
-          <a:prstGeom prst="roundRect">
-            <a:avLst>
-              <a:gd name="adj" fmla="val 5435"/>
-            </a:avLst>
-          </a:prstGeom>
-          <a:solidFill>
-            <a:srgbClr val="F2F5F6"/>
-          </a:solidFill>
-          <a:ln w="9525">
-            <a:solidFill>
-              <a:srgbClr val="D8DEE2"/>
-            </a:solidFill>
-            <a:prstDash val="solid"/>
-          </a:ln>
-        </p:spPr>
-      </p:sp>
-      <p:sp>
-        <p:nvSpPr>
-          <p:cNvPr id="14" name="Text 12"/>
-          <p:cNvSpPr/>
-          <p:nvPr/>
-        </p:nvSpPr>
-        <p:spPr>
-          <a:xfrm>
-            <a:off x="5118080" y="1700784"/>
-            <a:ext cx="1809232" cy="256032"/>
-          </a:xfrm>
-          <a:prstGeom prst="rect">
-            <a:avLst/>
-          </a:prstGeom>
-          <a:noFill/>
-          <a:ln/>
-        </p:spPr>
-        <p:txBody>
-          <a:bodyPr wrap="square" lIns="0" tIns="0" rIns="0" bIns="0" rtlCol="0" anchor="ctr"/>
-          <a:lstStyle/>
-          <a:p>
-            <a:pPr indent="0" marL="0">
-              <a:buNone/>
-            </a:pPr>
-            <a:r>
-              <a:rPr lang="en-US" sz="1300" b="1" dirty="0">
-                <a:solidFill>
-                  <a:srgbClr val="1B2429"/>
-                </a:solidFill>
-                <a:latin typeface="맑은 고딕" pitchFamily="34" charset="0"/>
-                <a:ea typeface="맑은 고딕" pitchFamily="34" charset="-122"/>
-                <a:cs typeface="맑은 고딕" pitchFamily="34" charset="-120"/>
-              </a:rPr>
-              <a:t>E3</a:t>
-            </a:r>
-            <a:endParaRPr lang="en-US" sz="1300" dirty="0"/>
-          </a:p>
-        </p:txBody>
-      </p:sp>
-      <p:sp>
-        <p:nvSpPr>
-          <p:cNvPr id="15" name="Text 13"/>
-          <p:cNvSpPr/>
-          <p:nvPr/>
-        </p:nvSpPr>
-        <p:spPr>
-          <a:xfrm>
-            <a:off x="5118080" y="1956816"/>
-            <a:ext cx="1809232" cy="237744"/>
-          </a:xfrm>
-          <a:prstGeom prst="rect">
-            <a:avLst/>
-          </a:prstGeom>
-          <a:noFill/>
-          <a:ln/>
-        </p:spPr>
-        <p:txBody>
-          <a:bodyPr wrap="square" lIns="0" tIns="0" rIns="0" bIns="0" rtlCol="0" anchor="ctr"/>
-          <a:lstStyle/>
-          <a:p>
-            <a:pPr indent="0" marL="0">
-              <a:buNone/>
-            </a:pPr>
-            <a:r>
-              <a:rPr lang="en-US" sz="1000" dirty="0">
-                <a:solidFill>
-                  <a:srgbClr val="3C4A52"/>
-                </a:solidFill>
-                <a:latin typeface="맑은 고딕" pitchFamily="34" charset="0"/>
-                <a:ea typeface="맑은 고딕" pitchFamily="34" charset="-122"/>
-                <a:cs typeface="맑은 고딕" pitchFamily="34" charset="-120"/>
-              </a:rPr>
-              <a:t>Redis 장애</a:t>
-            </a:r>
-            <a:endParaRPr lang="en-US" sz="1000" dirty="0"/>
-          </a:p>
-        </p:txBody>
-      </p:sp>
-      <p:sp>
-        <p:nvSpPr>
-          <p:cNvPr id="16" name="Text 14"/>
-          <p:cNvSpPr/>
-          <p:nvPr/>
-        </p:nvSpPr>
-        <p:spPr>
-          <a:xfrm>
-            <a:off x="5118080" y="2176272"/>
-            <a:ext cx="1809232" cy="237744"/>
-          </a:xfrm>
-          <a:prstGeom prst="rect">
-            <a:avLst/>
-          </a:prstGeom>
-          <a:noFill/>
-          <a:ln/>
-        </p:spPr>
-        <p:txBody>
-          <a:bodyPr wrap="square" lIns="0" tIns="0" rIns="0" bIns="0" rtlCol="0" anchor="ctr"/>
-          <a:lstStyle/>
-          <a:p>
-            <a:pPr indent="0" marL="0">
-              <a:buNone/>
-            </a:pPr>
-            <a:r>
-              <a:rPr lang="en-US" sz="1000" b="1" dirty="0">
-                <a:solidFill>
-                  <a:srgbClr val="7A8A93"/>
-                </a:solidFill>
-                <a:latin typeface="맑은 고딕" pitchFamily="34" charset="0"/>
-                <a:ea typeface="맑은 고딕" pitchFamily="34" charset="-122"/>
-                <a:cs typeface="맑은 고딕" pitchFamily="34" charset="-120"/>
-              </a:rPr>
-              <a:t>SKIP 유효</a:t>
-            </a:r>
-            <a:endParaRPr lang="en-US" sz="1000" dirty="0"/>
-          </a:p>
-        </p:txBody>
-      </p:sp>
-      <p:sp>
-        <p:nvSpPr>
-          <p:cNvPr id="17" name="Shape 15"/>
-          <p:cNvSpPr/>
-          <p:nvPr/>
-        </p:nvSpPr>
-        <p:spPr>
-          <a:xfrm>
-            <a:off x="7201632" y="1627632"/>
-            <a:ext cx="2065264" cy="841248"/>
-          </a:xfrm>
-          <a:prstGeom prst="roundRect">
-            <a:avLst>
-              <a:gd name="adj" fmla="val 5435"/>
-            </a:avLst>
-          </a:prstGeom>
-          <a:solidFill>
-            <a:srgbClr val="F2F5F6"/>
-          </a:solidFill>
-          <a:ln w="9525">
-            <a:solidFill>
-              <a:srgbClr val="D8DEE2"/>
-            </a:solidFill>
-            <a:prstDash val="solid"/>
-          </a:ln>
-        </p:spPr>
-      </p:sp>
-      <p:sp>
-        <p:nvSpPr>
-          <p:cNvPr id="18" name="Text 16"/>
-          <p:cNvSpPr/>
-          <p:nvPr/>
-        </p:nvSpPr>
-        <p:spPr>
-          <a:xfrm>
-            <a:off x="7329648" y="1700784"/>
-            <a:ext cx="1809232" cy="256032"/>
-          </a:xfrm>
-          <a:prstGeom prst="rect">
-            <a:avLst/>
-          </a:prstGeom>
-          <a:noFill/>
-          <a:ln/>
-        </p:spPr>
-        <p:txBody>
-          <a:bodyPr wrap="square" lIns="0" tIns="0" rIns="0" bIns="0" rtlCol="0" anchor="ctr"/>
-          <a:lstStyle/>
-          <a:p>
-            <a:pPr indent="0" marL="0">
-              <a:buNone/>
-            </a:pPr>
-            <a:r>
-              <a:rPr lang="en-US" sz="1300" b="1" dirty="0">
-                <a:solidFill>
-                  <a:srgbClr val="1B2429"/>
-                </a:solidFill>
-                <a:latin typeface="맑은 고딕" pitchFamily="34" charset="0"/>
-                <a:ea typeface="맑은 고딕" pitchFamily="34" charset="-122"/>
-                <a:cs typeface="맑은 고딕" pitchFamily="34" charset="-120"/>
-              </a:rPr>
-              <a:t>E4</a:t>
-            </a:r>
-            <a:endParaRPr lang="en-US" sz="1300" dirty="0"/>
-          </a:p>
-        </p:txBody>
-      </p:sp>
-      <p:sp>
-        <p:nvSpPr>
-          <p:cNvPr id="19" name="Text 17"/>
-          <p:cNvSpPr/>
-          <p:nvPr/>
-        </p:nvSpPr>
-        <p:spPr>
-          <a:xfrm>
-            <a:off x="7329648" y="1956816"/>
-            <a:ext cx="1809232" cy="237744"/>
-          </a:xfrm>
-          <a:prstGeom prst="rect">
-            <a:avLst/>
-          </a:prstGeom>
-          <a:noFill/>
-          <a:ln/>
-        </p:spPr>
-        <p:txBody>
-          <a:bodyPr wrap="square" lIns="0" tIns="0" rIns="0" bIns="0" rtlCol="0" anchor="ctr"/>
-          <a:lstStyle/>
-          <a:p>
-            <a:pPr indent="0" marL="0">
-              <a:buNone/>
-            </a:pPr>
-            <a:r>
-              <a:rPr lang="en-US" sz="1000" dirty="0">
-                <a:solidFill>
-                  <a:srgbClr val="3C4A52"/>
-                </a:solidFill>
-                <a:latin typeface="맑은 고딕" pitchFamily="34" charset="0"/>
-                <a:ea typeface="맑은 고딕" pitchFamily="34" charset="-122"/>
-                <a:cs typeface="맑은 고딕" pitchFamily="34" charset="-120"/>
-              </a:rPr>
-              <a:t>리더 kill</a:t>
-            </a:r>
-            <a:endParaRPr lang="en-US" sz="1000" dirty="0"/>
-          </a:p>
-        </p:txBody>
-      </p:sp>
-      <p:sp>
-        <p:nvSpPr>
-          <p:cNvPr id="20" name="Text 18"/>
-          <p:cNvSpPr/>
-          <p:nvPr/>
-        </p:nvSpPr>
-        <p:spPr>
-          <a:xfrm>
-            <a:off x="7329648" y="2176272"/>
-            <a:ext cx="1809232" cy="237744"/>
-          </a:xfrm>
-          <a:prstGeom prst="rect">
-            <a:avLst/>
-          </a:prstGeom>
-          <a:noFill/>
-          <a:ln/>
-        </p:spPr>
-        <p:txBody>
-          <a:bodyPr wrap="square" lIns="0" tIns="0" rIns="0" bIns="0" rtlCol="0" anchor="ctr"/>
-          <a:lstStyle/>
-          <a:p>
-            <a:pPr indent="0" marL="0">
-              <a:buNone/>
-            </a:pPr>
-            <a:r>
-              <a:rPr lang="en-US" sz="1000" b="1" dirty="0">
-                <a:solidFill>
-                  <a:srgbClr val="7A8A93"/>
-                </a:solidFill>
-                <a:latin typeface="맑은 고딕" pitchFamily="34" charset="0"/>
-                <a:ea typeface="맑은 고딕" pitchFamily="34" charset="-122"/>
-                <a:cs typeface="맑은 고딕" pitchFamily="34" charset="-120"/>
-              </a:rPr>
-              <a:t>재측정</a:t>
-            </a:r>
-            <a:endParaRPr lang="en-US" sz="1000" dirty="0"/>
-          </a:p>
-        </p:txBody>
-      </p:sp>
-      <p:sp>
-        <p:nvSpPr>
-          <p:cNvPr id="21" name="Shape 19"/>
-          <p:cNvSpPr/>
-          <p:nvPr/>
-        </p:nvSpPr>
-        <p:spPr>
-          <a:xfrm>
-            <a:off x="9413199" y="1627632"/>
-            <a:ext cx="2065264" cy="841248"/>
-          </a:xfrm>
-          <a:prstGeom prst="roundRect">
-            <a:avLst>
-              <a:gd name="adj" fmla="val 5435"/>
-            </a:avLst>
-          </a:prstGeom>
-          <a:solidFill>
-            <a:srgbClr val="E4EDE8"/>
-          </a:solidFill>
-          <a:ln w="9525">
-            <a:solidFill>
-              <a:srgbClr val="D8DEE2"/>
-            </a:solidFill>
-            <a:prstDash val="solid"/>
-          </a:ln>
-        </p:spPr>
-      </p:sp>
-      <p:sp>
-        <p:nvSpPr>
-          <p:cNvPr id="22" name="Text 20"/>
-          <p:cNvSpPr/>
-          <p:nvPr/>
-        </p:nvSpPr>
-        <p:spPr>
-          <a:xfrm>
-            <a:off x="9541215" y="1700784"/>
-            <a:ext cx="1809232" cy="256032"/>
-          </a:xfrm>
-          <a:prstGeom prst="rect">
-            <a:avLst/>
-          </a:prstGeom>
-          <a:noFill/>
-          <a:ln/>
-        </p:spPr>
-        <p:txBody>
-          <a:bodyPr wrap="square" lIns="0" tIns="0" rIns="0" bIns="0" rtlCol="0" anchor="ctr"/>
-          <a:lstStyle/>
-          <a:p>
-            <a:pPr indent="0" marL="0">
-              <a:buNone/>
-            </a:pPr>
-            <a:r>
-              <a:rPr lang="en-US" sz="1300" b="1" dirty="0">
-                <a:solidFill>
-                  <a:srgbClr val="1B2429"/>
-                </a:solidFill>
-                <a:latin typeface="맑은 고딕" pitchFamily="34" charset="0"/>
-                <a:ea typeface="맑은 고딕" pitchFamily="34" charset="-122"/>
-                <a:cs typeface="맑은 고딕" pitchFamily="34" charset="-120"/>
-              </a:rPr>
-              <a:t>E5</a:t>
-            </a:r>
-            <a:endParaRPr lang="en-US" sz="1300" dirty="0"/>
-          </a:p>
-        </p:txBody>
-      </p:sp>
-      <p:sp>
-        <p:nvSpPr>
-          <p:cNvPr id="23" name="Text 21"/>
-          <p:cNvSpPr/>
-          <p:nvPr/>
-        </p:nvSpPr>
-        <p:spPr>
-          <a:xfrm>
-            <a:off x="9541215" y="1956816"/>
-            <a:ext cx="1809232" cy="237744"/>
-          </a:xfrm>
-          <a:prstGeom prst="rect">
-            <a:avLst/>
-          </a:prstGeom>
-          <a:noFill/>
-          <a:ln/>
-        </p:spPr>
-        <p:txBody>
-          <a:bodyPr wrap="square" lIns="0" tIns="0" rIns="0" bIns="0" rtlCol="0" anchor="ctr"/>
-          <a:lstStyle/>
-          <a:p>
-            <a:pPr indent="0" marL="0">
-              <a:buNone/>
-            </a:pPr>
-            <a:r>
-              <a:rPr lang="en-US" sz="1000" dirty="0">
-                <a:solidFill>
-                  <a:srgbClr val="3C4A52"/>
-                </a:solidFill>
-                <a:latin typeface="맑은 고딕" pitchFamily="34" charset="0"/>
-                <a:ea typeface="맑은 고딕" pitchFamily="34" charset="-122"/>
-                <a:cs typeface="맑은 고딕" pitchFamily="34" charset="-120"/>
-              </a:rPr>
-              <a:t>네트워크 분단</a:t>
-            </a:r>
-            <a:endParaRPr lang="en-US" sz="1000" dirty="0"/>
-          </a:p>
-        </p:txBody>
-      </p:sp>
-      <p:sp>
-        <p:nvSpPr>
-          <p:cNvPr id="24" name="Text 22"/>
-          <p:cNvSpPr/>
-          <p:nvPr/>
-        </p:nvSpPr>
-        <p:spPr>
-          <a:xfrm>
-            <a:off x="9541215" y="2176272"/>
-            <a:ext cx="1809232" cy="237744"/>
-          </a:xfrm>
-          <a:prstGeom prst="rect">
-            <a:avLst/>
-          </a:prstGeom>
-          <a:noFill/>
-          <a:ln/>
-        </p:spPr>
-        <p:txBody>
-          <a:bodyPr wrap="square" lIns="0" tIns="0" rIns="0" bIns="0" rtlCol="0" anchor="ctr"/>
-          <a:lstStyle/>
-          <a:p>
-            <a:pPr indent="0" marL="0">
-              <a:buNone/>
-            </a:pPr>
-            <a:r>
-              <a:rPr lang="en-US" sz="1000" b="1" dirty="0">
-                <a:solidFill>
-                  <a:srgbClr val="2F6B54"/>
-                </a:solidFill>
-                <a:latin typeface="맑은 고딕" pitchFamily="34" charset="0"/>
-                <a:ea typeface="맑은 고딕" pitchFamily="34" charset="-122"/>
-                <a:cs typeface="맑은 고딕" pitchFamily="34" charset="-120"/>
-              </a:rPr>
-              <a:t>PASS</a:t>
-            </a:r>
-            <a:endParaRPr lang="en-US" sz="1000" dirty="0"/>
-          </a:p>
-        </p:txBody>
-      </p:sp>
-      <p:sp>
-        <p:nvSpPr>
-          <p:cNvPr id="25" name="Shape 23"/>
-          <p:cNvSpPr/>
-          <p:nvPr/>
-        </p:nvSpPr>
-        <p:spPr>
-          <a:xfrm>
-            <a:off x="566928" y="2651760"/>
-            <a:ext cx="2065264" cy="841248"/>
-          </a:xfrm>
-          <a:prstGeom prst="roundRect">
-            <a:avLst>
-              <a:gd name="adj" fmla="val 5435"/>
-            </a:avLst>
-          </a:prstGeom>
-          <a:solidFill>
-            <a:srgbClr val="E4EDE8"/>
-          </a:solidFill>
-          <a:ln w="9525">
-            <a:solidFill>
-              <a:srgbClr val="D8DEE2"/>
-            </a:solidFill>
-            <a:prstDash val="solid"/>
-          </a:ln>
-        </p:spPr>
-      </p:sp>
-      <p:sp>
-        <p:nvSpPr>
-          <p:cNvPr id="26" name="Text 24"/>
-          <p:cNvSpPr/>
-          <p:nvPr/>
-        </p:nvSpPr>
-        <p:spPr>
-          <a:xfrm>
-            <a:off x="694944" y="2724912"/>
-            <a:ext cx="1809232" cy="256032"/>
-          </a:xfrm>
-          <a:prstGeom prst="rect">
-            <a:avLst/>
-          </a:prstGeom>
-          <a:noFill/>
-          <a:ln/>
-        </p:spPr>
-        <p:txBody>
-          <a:bodyPr wrap="square" lIns="0" tIns="0" rIns="0" bIns="0" rtlCol="0" anchor="ctr"/>
-          <a:lstStyle/>
-          <a:p>
-            <a:pPr indent="0" marL="0">
-              <a:buNone/>
-            </a:pPr>
-            <a:r>
-              <a:rPr lang="en-US" sz="1300" b="1" dirty="0">
-                <a:solidFill>
-                  <a:srgbClr val="1B2429"/>
-                </a:solidFill>
-                <a:latin typeface="맑은 고딕" pitchFamily="34" charset="0"/>
-                <a:ea typeface="맑은 고딕" pitchFamily="34" charset="-122"/>
-                <a:cs typeface="맑은 고딕" pitchFamily="34" charset="-120"/>
-              </a:rPr>
-              <a:t>E6</a:t>
-            </a:r>
-            <a:endParaRPr lang="en-US" sz="1300" dirty="0"/>
-          </a:p>
-        </p:txBody>
-      </p:sp>
-      <p:sp>
-        <p:nvSpPr>
-          <p:cNvPr id="27" name="Text 25"/>
-          <p:cNvSpPr/>
-          <p:nvPr/>
-        </p:nvSpPr>
-        <p:spPr>
-          <a:xfrm>
-            <a:off x="694944" y="2980944"/>
-            <a:ext cx="1809232" cy="237744"/>
-          </a:xfrm>
-          <a:prstGeom prst="rect">
-            <a:avLst/>
-          </a:prstGeom>
-          <a:noFill/>
-          <a:ln/>
-        </p:spPr>
-        <p:txBody>
-          <a:bodyPr wrap="square" lIns="0" tIns="0" rIns="0" bIns="0" rtlCol="0" anchor="ctr"/>
-          <a:lstStyle/>
-          <a:p>
-            <a:pPr indent="0" marL="0">
-              <a:buNone/>
-            </a:pPr>
-            <a:r>
-              <a:rPr lang="en-US" sz="1000" dirty="0">
-                <a:solidFill>
-                  <a:srgbClr val="3C4A52"/>
-                </a:solidFill>
-                <a:latin typeface="맑은 고딕" pitchFamily="34" charset="0"/>
-                <a:ea typeface="맑은 고딕" pitchFamily="34" charset="-122"/>
-                <a:cs typeface="맑은 고딕" pitchFamily="34" charset="-120"/>
-              </a:rPr>
-              <a:t>폭주+kill</a:t>
-            </a:r>
-            <a:endParaRPr lang="en-US" sz="1000" dirty="0"/>
-          </a:p>
-        </p:txBody>
-      </p:sp>
-      <p:sp>
-        <p:nvSpPr>
-          <p:cNvPr id="28" name="Text 26"/>
-          <p:cNvSpPr/>
-          <p:nvPr/>
-        </p:nvSpPr>
-        <p:spPr>
-          <a:xfrm>
-            <a:off x="694944" y="3200400"/>
-            <a:ext cx="1809232" cy="237744"/>
-          </a:xfrm>
-          <a:prstGeom prst="rect">
-            <a:avLst/>
-          </a:prstGeom>
-          <a:noFill/>
-          <a:ln/>
-        </p:spPr>
-        <p:txBody>
-          <a:bodyPr wrap="square" lIns="0" tIns="0" rIns="0" bIns="0" rtlCol="0" anchor="ctr"/>
-          <a:lstStyle/>
-          <a:p>
-            <a:pPr indent="0" marL="0">
-              <a:buNone/>
-            </a:pPr>
-            <a:r>
-              <a:rPr lang="en-US" sz="1000" b="1" dirty="0">
-                <a:solidFill>
-                  <a:srgbClr val="2F6B54"/>
-                </a:solidFill>
-                <a:latin typeface="맑은 고딕" pitchFamily="34" charset="0"/>
-                <a:ea typeface="맑은 고딕" pitchFamily="34" charset="-122"/>
-                <a:cs typeface="맑은 고딕" pitchFamily="34" charset="-120"/>
-              </a:rPr>
-              <a:t>PASS</a:t>
-            </a:r>
-            <a:endParaRPr lang="en-US" sz="1000" dirty="0"/>
-          </a:p>
-        </p:txBody>
-      </p:sp>
-      <p:sp>
-        <p:nvSpPr>
-          <p:cNvPr id="29" name="Shape 27"/>
-          <p:cNvSpPr/>
-          <p:nvPr/>
-        </p:nvSpPr>
-        <p:spPr>
-          <a:xfrm>
-            <a:off x="2778496" y="2651760"/>
-            <a:ext cx="2065264" cy="841248"/>
-          </a:xfrm>
-          <a:prstGeom prst="roundRect">
-            <a:avLst>
-              <a:gd name="adj" fmla="val 5435"/>
-            </a:avLst>
-          </a:prstGeom>
-          <a:solidFill>
-            <a:srgbClr val="E4EDE8"/>
-          </a:solidFill>
-          <a:ln w="9525">
-            <a:solidFill>
-              <a:srgbClr val="D8DEE2"/>
-            </a:solidFill>
-            <a:prstDash val="solid"/>
-          </a:ln>
-        </p:spPr>
-      </p:sp>
-      <p:sp>
-        <p:nvSpPr>
-          <p:cNvPr id="30" name="Text 28"/>
-          <p:cNvSpPr/>
-          <p:nvPr/>
-        </p:nvSpPr>
-        <p:spPr>
-          <a:xfrm>
-            <a:off x="2906512" y="2724912"/>
-            <a:ext cx="1809232" cy="256032"/>
-          </a:xfrm>
-          <a:prstGeom prst="rect">
-            <a:avLst/>
-          </a:prstGeom>
-          <a:noFill/>
-          <a:ln/>
-        </p:spPr>
-        <p:txBody>
-          <a:bodyPr wrap="square" lIns="0" tIns="0" rIns="0" bIns="0" rtlCol="0" anchor="ctr"/>
-          <a:lstStyle/>
-          <a:p>
-            <a:pPr indent="0" marL="0">
-              <a:buNone/>
-            </a:pPr>
-            <a:r>
-              <a:rPr lang="en-US" sz="1300" b="1" dirty="0">
-                <a:solidFill>
-                  <a:srgbClr val="1B2429"/>
-                </a:solidFill>
-                <a:latin typeface="맑은 고딕" pitchFamily="34" charset="0"/>
-                <a:ea typeface="맑은 고딕" pitchFamily="34" charset="-122"/>
-                <a:cs typeface="맑은 고딕" pitchFamily="34" charset="-120"/>
-              </a:rPr>
-              <a:t>E7</a:t>
-            </a:r>
-            <a:endParaRPr lang="en-US" sz="1300" dirty="0"/>
-          </a:p>
-        </p:txBody>
-      </p:sp>
-      <p:sp>
-        <p:nvSpPr>
-          <p:cNvPr id="31" name="Text 29"/>
-          <p:cNvSpPr/>
-          <p:nvPr/>
-        </p:nvSpPr>
-        <p:spPr>
-          <a:xfrm>
-            <a:off x="2906512" y="2980944"/>
-            <a:ext cx="1809232" cy="237744"/>
-          </a:xfrm>
-          <a:prstGeom prst="rect">
-            <a:avLst/>
-          </a:prstGeom>
-          <a:noFill/>
-          <a:ln/>
-        </p:spPr>
-        <p:txBody>
-          <a:bodyPr wrap="square" lIns="0" tIns="0" rIns="0" bIns="0" rtlCol="0" anchor="ctr"/>
-          <a:lstStyle/>
-          <a:p>
-            <a:pPr indent="0" marL="0">
-              <a:buNone/>
-            </a:pPr>
-            <a:r>
-              <a:rPr lang="en-US" sz="1000" dirty="0">
-                <a:solidFill>
-                  <a:srgbClr val="3C4A52"/>
-                </a:solidFill>
-                <a:latin typeface="맑은 고딕" pitchFamily="34" charset="0"/>
-                <a:ea typeface="맑은 고딕" pitchFamily="34" charset="-122"/>
-                <a:cs typeface="맑은 고딕" pitchFamily="34" charset="-120"/>
-              </a:rPr>
-              <a:t>그레이 장애</a:t>
-            </a:r>
-            <a:endParaRPr lang="en-US" sz="1000" dirty="0"/>
-          </a:p>
-        </p:txBody>
-      </p:sp>
-      <p:sp>
-        <p:nvSpPr>
-          <p:cNvPr id="32" name="Text 30"/>
-          <p:cNvSpPr/>
-          <p:nvPr/>
-        </p:nvSpPr>
-        <p:spPr>
-          <a:xfrm>
-            <a:off x="2906512" y="3200400"/>
-            <a:ext cx="1809232" cy="237744"/>
-          </a:xfrm>
-          <a:prstGeom prst="rect">
-            <a:avLst/>
-          </a:prstGeom>
-          <a:noFill/>
-          <a:ln/>
-        </p:spPr>
-        <p:txBody>
-          <a:bodyPr wrap="square" lIns="0" tIns="0" rIns="0" bIns="0" rtlCol="0" anchor="ctr"/>
-          <a:lstStyle/>
-          <a:p>
-            <a:pPr indent="0" marL="0">
-              <a:buNone/>
-            </a:pPr>
-            <a:r>
-              <a:rPr lang="en-US" sz="1000" b="1" dirty="0">
-                <a:solidFill>
-                  <a:srgbClr val="2F6B54"/>
-                </a:solidFill>
-                <a:latin typeface="맑은 고딕" pitchFamily="34" charset="0"/>
-                <a:ea typeface="맑은 고딕" pitchFamily="34" charset="-122"/>
-                <a:cs typeface="맑은 고딕" pitchFamily="34" charset="-120"/>
-              </a:rPr>
-              <a:t>PASS</a:t>
-            </a:r>
-            <a:endParaRPr lang="en-US" sz="1000" dirty="0"/>
-          </a:p>
-        </p:txBody>
-      </p:sp>
-      <p:sp>
-        <p:nvSpPr>
-          <p:cNvPr id="33" name="Shape 31"/>
-          <p:cNvSpPr/>
-          <p:nvPr/>
-        </p:nvSpPr>
-        <p:spPr>
-          <a:xfrm>
-            <a:off x="4990064" y="2651760"/>
-            <a:ext cx="2065264" cy="841248"/>
-          </a:xfrm>
-          <a:prstGeom prst="roundRect">
-            <a:avLst>
-              <a:gd name="adj" fmla="val 5435"/>
-            </a:avLst>
-          </a:prstGeom>
-          <a:solidFill>
-            <a:srgbClr val="F2F5F6"/>
-          </a:solidFill>
-          <a:ln w="9525">
-            <a:solidFill>
-              <a:srgbClr val="D8DEE2"/>
-            </a:solidFill>
-            <a:prstDash val="solid"/>
-          </a:ln>
-        </p:spPr>
-      </p:sp>
-      <p:sp>
-        <p:nvSpPr>
-          <p:cNvPr id="34" name="Text 32"/>
-          <p:cNvSpPr/>
-          <p:nvPr/>
-        </p:nvSpPr>
-        <p:spPr>
-          <a:xfrm>
-            <a:off x="5118080" y="2724912"/>
-            <a:ext cx="1809232" cy="256032"/>
-          </a:xfrm>
-          <a:prstGeom prst="rect">
-            <a:avLst/>
-          </a:prstGeom>
-          <a:noFill/>
-          <a:ln/>
-        </p:spPr>
-        <p:txBody>
-          <a:bodyPr wrap="square" lIns="0" tIns="0" rIns="0" bIns="0" rtlCol="0" anchor="ctr"/>
-          <a:lstStyle/>
-          <a:p>
-            <a:pPr indent="0" marL="0">
-              <a:buNone/>
-            </a:pPr>
-            <a:r>
-              <a:rPr lang="en-US" sz="1300" b="1" dirty="0">
-                <a:solidFill>
-                  <a:srgbClr val="1B2429"/>
-                </a:solidFill>
-                <a:latin typeface="맑은 고딕" pitchFamily="34" charset="0"/>
-                <a:ea typeface="맑은 고딕" pitchFamily="34" charset="-122"/>
-                <a:cs typeface="맑은 고딕" pitchFamily="34" charset="-120"/>
-              </a:rPr>
-              <a:t>E8</a:t>
-            </a:r>
-            <a:endParaRPr lang="en-US" sz="1300" dirty="0"/>
-          </a:p>
-        </p:txBody>
-      </p:sp>
-      <p:sp>
-        <p:nvSpPr>
-          <p:cNvPr id="35" name="Text 33"/>
-          <p:cNvSpPr/>
-          <p:nvPr/>
-        </p:nvSpPr>
-        <p:spPr>
-          <a:xfrm>
-            <a:off x="5118080" y="2980944"/>
-            <a:ext cx="1809232" cy="237744"/>
-          </a:xfrm>
-          <a:prstGeom prst="rect">
-            <a:avLst/>
-          </a:prstGeom>
-          <a:noFill/>
-          <a:ln/>
-        </p:spPr>
-        <p:txBody>
-          <a:bodyPr wrap="square" lIns="0" tIns="0" rIns="0" bIns="0" rtlCol="0" anchor="ctr"/>
-          <a:lstStyle/>
-          <a:p>
-            <a:pPr indent="0" marL="0">
-              <a:buNone/>
-            </a:pPr>
-            <a:r>
-              <a:rPr lang="en-US" sz="1000" dirty="0">
-                <a:solidFill>
-                  <a:srgbClr val="3C4A52"/>
-                </a:solidFill>
-                <a:latin typeface="맑은 고딕" pitchFamily="34" charset="0"/>
-                <a:ea typeface="맑은 고딕" pitchFamily="34" charset="-122"/>
-                <a:cs typeface="맑은 고딕" pitchFamily="34" charset="-120"/>
-              </a:rPr>
-              <a:t>앱 assault</a:t>
-            </a:r>
-            <a:endParaRPr lang="en-US" sz="1000" dirty="0"/>
-          </a:p>
-        </p:txBody>
-      </p:sp>
-      <p:sp>
-        <p:nvSpPr>
-          <p:cNvPr id="36" name="Text 34"/>
-          <p:cNvSpPr/>
-          <p:nvPr/>
-        </p:nvSpPr>
-        <p:spPr>
-          <a:xfrm>
-            <a:off x="5118080" y="3200400"/>
-            <a:ext cx="1809232" cy="237744"/>
-          </a:xfrm>
-          <a:prstGeom prst="rect">
-            <a:avLst/>
-          </a:prstGeom>
-          <a:noFill/>
-          <a:ln/>
-        </p:spPr>
-        <p:txBody>
-          <a:bodyPr wrap="square" lIns="0" tIns="0" rIns="0" bIns="0" rtlCol="0" anchor="ctr"/>
-          <a:lstStyle/>
-          <a:p>
-            <a:pPr indent="0" marL="0">
-              <a:buNone/>
-            </a:pPr>
-            <a:r>
-              <a:rPr lang="en-US" sz="1000" b="1" dirty="0">
-                <a:solidFill>
-                  <a:srgbClr val="7A8A93"/>
-                </a:solidFill>
-                <a:latin typeface="맑은 고딕" pitchFamily="34" charset="0"/>
-                <a:ea typeface="맑은 고딕" pitchFamily="34" charset="-122"/>
-                <a:cs typeface="맑은 고딕" pitchFamily="34" charset="-120"/>
-              </a:rPr>
-              <a:t>배선</a:t>
-            </a:r>
-            <a:endParaRPr lang="en-US" sz="1000" dirty="0"/>
-          </a:p>
-        </p:txBody>
-      </p:sp>
-      <p:sp>
-        <p:nvSpPr>
-          <p:cNvPr id="37" name="Shape 35"/>
-          <p:cNvSpPr/>
-          <p:nvPr/>
-        </p:nvSpPr>
-        <p:spPr>
-          <a:xfrm>
-            <a:off x="7201632" y="2651760"/>
-            <a:ext cx="2065264" cy="841248"/>
-          </a:xfrm>
-          <a:prstGeom prst="roundRect">
-            <a:avLst>
-              <a:gd name="adj" fmla="val 5435"/>
-            </a:avLst>
-          </a:prstGeom>
-          <a:solidFill>
-            <a:srgbClr val="E4EDE8"/>
-          </a:solidFill>
-          <a:ln w="9525">
-            <a:solidFill>
-              <a:srgbClr val="D8DEE2"/>
-            </a:solidFill>
-            <a:prstDash val="solid"/>
-          </a:ln>
-        </p:spPr>
-      </p:sp>
-      <p:sp>
-        <p:nvSpPr>
-          <p:cNvPr id="38" name="Text 36"/>
-          <p:cNvSpPr/>
-          <p:nvPr/>
-        </p:nvSpPr>
-        <p:spPr>
-          <a:xfrm>
-            <a:off x="7329648" y="2724912"/>
-            <a:ext cx="1809232" cy="256032"/>
-          </a:xfrm>
-          <a:prstGeom prst="rect">
-            <a:avLst/>
-          </a:prstGeom>
-          <a:noFill/>
-          <a:ln/>
-        </p:spPr>
-        <p:txBody>
-          <a:bodyPr wrap="square" lIns="0" tIns="0" rIns="0" bIns="0" rtlCol="0" anchor="ctr"/>
-          <a:lstStyle/>
-          <a:p>
-            <a:pPr indent="0" marL="0">
-              <a:buNone/>
-            </a:pPr>
-            <a:r>
-              <a:rPr lang="en-US" sz="1300" b="1" dirty="0">
-                <a:solidFill>
-                  <a:srgbClr val="1B2429"/>
-                </a:solidFill>
-                <a:latin typeface="맑은 고딕" pitchFamily="34" charset="0"/>
-                <a:ea typeface="맑은 고딕" pitchFamily="34" charset="-122"/>
-                <a:cs typeface="맑은 고딕" pitchFamily="34" charset="-120"/>
-              </a:rPr>
-              <a:t>E9</a:t>
-            </a:r>
-            <a:endParaRPr lang="en-US" sz="1300" dirty="0"/>
-          </a:p>
-        </p:txBody>
-      </p:sp>
-      <p:sp>
-        <p:nvSpPr>
-          <p:cNvPr id="39" name="Text 37"/>
-          <p:cNvSpPr/>
-          <p:nvPr/>
-        </p:nvSpPr>
-        <p:spPr>
-          <a:xfrm>
-            <a:off x="7329648" y="2980944"/>
-            <a:ext cx="1809232" cy="237744"/>
-          </a:xfrm>
-          <a:prstGeom prst="rect">
-            <a:avLst/>
-          </a:prstGeom>
-          <a:noFill/>
-          <a:ln/>
-        </p:spPr>
-        <p:txBody>
-          <a:bodyPr wrap="square" lIns="0" tIns="0" rIns="0" bIns="0" rtlCol="0" anchor="ctr"/>
-          <a:lstStyle/>
-          <a:p>
-            <a:pPr indent="0" marL="0">
-              <a:buNone/>
-            </a:pPr>
-            <a:r>
-              <a:rPr lang="en-US" sz="1000" dirty="0">
-                <a:solidFill>
-                  <a:srgbClr val="3C4A52"/>
-                </a:solidFill>
-                <a:latin typeface="맑은 고딕" pitchFamily="34" charset="0"/>
-                <a:ea typeface="맑은 고딕" pitchFamily="34" charset="-122"/>
-                <a:cs typeface="맑은 고딕" pitchFamily="34" charset="-120"/>
-              </a:rPr>
-              <a:t>커밋 단절</a:t>
-            </a:r>
-            <a:endParaRPr lang="en-US" sz="1000" dirty="0"/>
-          </a:p>
-        </p:txBody>
-      </p:sp>
-      <p:sp>
-        <p:nvSpPr>
-          <p:cNvPr id="40" name="Text 38"/>
-          <p:cNvSpPr/>
-          <p:nvPr/>
-        </p:nvSpPr>
-        <p:spPr>
-          <a:xfrm>
-            <a:off x="7329648" y="3200400"/>
-            <a:ext cx="1809232" cy="237744"/>
-          </a:xfrm>
-          <a:prstGeom prst="rect">
-            <a:avLst/>
-          </a:prstGeom>
-          <a:noFill/>
-          <a:ln/>
-        </p:spPr>
-        <p:txBody>
-          <a:bodyPr wrap="square" lIns="0" tIns="0" rIns="0" bIns="0" rtlCol="0" anchor="ctr"/>
-          <a:lstStyle/>
-          <a:p>
-            <a:pPr indent="0" marL="0">
-              <a:buNone/>
-            </a:pPr>
-            <a:r>
-              <a:rPr lang="en-US" sz="1000" b="1" dirty="0">
-                <a:solidFill>
-                  <a:srgbClr val="2F6B54"/>
-                </a:solidFill>
-                <a:latin typeface="맑은 고딕" pitchFamily="34" charset="0"/>
-                <a:ea typeface="맑은 고딕" pitchFamily="34" charset="-122"/>
-                <a:cs typeface="맑은 고딕" pitchFamily="34" charset="-120"/>
-              </a:rPr>
-              <a:t>PASS</a:t>
-            </a:r>
-            <a:endParaRPr lang="en-US" sz="1000" dirty="0"/>
-          </a:p>
-        </p:txBody>
-      </p:sp>
-      <p:sp>
-        <p:nvSpPr>
-          <p:cNvPr id="41" name="Shape 39"/>
-          <p:cNvSpPr/>
-          <p:nvPr/>
-        </p:nvSpPr>
-        <p:spPr>
-          <a:xfrm>
-            <a:off x="9413199" y="2651760"/>
-            <a:ext cx="2065264" cy="841248"/>
-          </a:xfrm>
-          <a:prstGeom prst="roundRect">
-            <a:avLst>
-              <a:gd name="adj" fmla="val 5435"/>
-            </a:avLst>
-          </a:prstGeom>
-          <a:solidFill>
-            <a:srgbClr val="F6E9E7"/>
-          </a:solidFill>
-          <a:ln w="9525">
-            <a:solidFill>
-              <a:srgbClr val="D8DEE2"/>
-            </a:solidFill>
-            <a:prstDash val="solid"/>
-          </a:ln>
-        </p:spPr>
-      </p:sp>
-      <p:sp>
-        <p:nvSpPr>
-          <p:cNvPr id="42" name="Text 40"/>
-          <p:cNvSpPr/>
-          <p:nvPr/>
-        </p:nvSpPr>
-        <p:spPr>
-          <a:xfrm>
-            <a:off x="9541215" y="2724912"/>
-            <a:ext cx="1809232" cy="256032"/>
-          </a:xfrm>
-          <a:prstGeom prst="rect">
-            <a:avLst/>
-          </a:prstGeom>
-          <a:noFill/>
-          <a:ln/>
-        </p:spPr>
-        <p:txBody>
-          <a:bodyPr wrap="square" lIns="0" tIns="0" rIns="0" bIns="0" rtlCol="0" anchor="ctr"/>
-          <a:lstStyle/>
-          <a:p>
-            <a:pPr indent="0" marL="0">
-              <a:buNone/>
-            </a:pPr>
-            <a:r>
-              <a:rPr lang="en-US" sz="1300" b="1" dirty="0">
-                <a:solidFill>
-                  <a:srgbClr val="1B2429"/>
-                </a:solidFill>
-                <a:latin typeface="맑은 고딕" pitchFamily="34" charset="0"/>
-                <a:ea typeface="맑은 고딕" pitchFamily="34" charset="-122"/>
-                <a:cs typeface="맑은 고딕" pitchFamily="34" charset="-120"/>
-              </a:rPr>
-              <a:t>E10</a:t>
-            </a:r>
-            <a:endParaRPr lang="en-US" sz="1300" dirty="0"/>
-          </a:p>
-        </p:txBody>
-      </p:sp>
-      <p:sp>
-        <p:nvSpPr>
-          <p:cNvPr id="43" name="Text 41"/>
-          <p:cNvSpPr/>
-          <p:nvPr/>
-        </p:nvSpPr>
-        <p:spPr>
-          <a:xfrm>
-            <a:off x="9541215" y="2980944"/>
-            <a:ext cx="1809232" cy="237744"/>
-          </a:xfrm>
-          <a:prstGeom prst="rect">
-            <a:avLst/>
-          </a:prstGeom>
-          <a:noFill/>
-          <a:ln/>
-        </p:spPr>
-        <p:txBody>
-          <a:bodyPr wrap="square" lIns="0" tIns="0" rIns="0" bIns="0" rtlCol="0" anchor="ctr"/>
-          <a:lstStyle/>
-          <a:p>
-            <a:pPr indent="0" marL="0">
-              <a:buNone/>
-            </a:pPr>
-            <a:r>
-              <a:rPr lang="en-US" sz="1000" dirty="0">
-                <a:solidFill>
-                  <a:srgbClr val="3C4A52"/>
-                </a:solidFill>
-                <a:latin typeface="맑은 고딕" pitchFamily="34" charset="0"/>
-                <a:ea typeface="맑은 고딕" pitchFamily="34" charset="-122"/>
-                <a:cs typeface="맑은 고딕" pitchFamily="34" charset="-120"/>
-              </a:rPr>
-              <a:t>tc netem</a:t>
-            </a:r>
-            <a:endParaRPr lang="en-US" sz="1000" dirty="0"/>
-          </a:p>
-        </p:txBody>
-      </p:sp>
-      <p:sp>
-        <p:nvSpPr>
-          <p:cNvPr id="44" name="Text 42"/>
-          <p:cNvSpPr/>
-          <p:nvPr/>
-        </p:nvSpPr>
-        <p:spPr>
-          <a:xfrm>
-            <a:off x="9541215" y="3200400"/>
-            <a:ext cx="1809232" cy="237744"/>
-          </a:xfrm>
-          <a:prstGeom prst="rect">
-            <a:avLst/>
-          </a:prstGeom>
-          <a:noFill/>
-          <a:ln/>
-        </p:spPr>
-        <p:txBody>
-          <a:bodyPr wrap="square" lIns="0" tIns="0" rIns="0" bIns="0" rtlCol="0" anchor="ctr"/>
-          <a:lstStyle/>
-          <a:p>
-            <a:pPr indent="0" marL="0">
-              <a:buNone/>
-            </a:pPr>
-            <a:r>
-              <a:rPr lang="en-US" sz="1000" b="1" dirty="0">
-                <a:solidFill>
-                  <a:srgbClr val="B33A32"/>
-                </a:solidFill>
-                <a:latin typeface="맑은 고딕" pitchFamily="34" charset="0"/>
-                <a:ea typeface="맑은 고딕" pitchFamily="34" charset="-122"/>
-                <a:cs typeface="맑은 고딕" pitchFamily="34" charset="-120"/>
-              </a:rPr>
-              <a:t>신규</a:t>
-            </a:r>
-            <a:endParaRPr lang="en-US" sz="1000" dirty="0"/>
-          </a:p>
-        </p:txBody>
-      </p:sp>
-      <p:sp>
-        <p:nvSpPr>
-          <p:cNvPr id="45" name="Shape 43"/>
-          <p:cNvSpPr/>
-          <p:nvPr/>
-        </p:nvSpPr>
-        <p:spPr>
-          <a:xfrm>
-            <a:off x="566928" y="3913632"/>
-            <a:ext cx="2490140" cy="420624"/>
-          </a:xfrm>
-          <a:prstGeom prst="roundRect">
-            <a:avLst>
-              <a:gd name="adj" fmla="val 17391"/>
-            </a:avLst>
-          </a:prstGeom>
-          <a:solidFill>
-            <a:srgbClr val="222E35"/>
-          </a:solidFill>
-          <a:ln/>
-        </p:spPr>
-      </p:sp>
-      <p:sp>
-        <p:nvSpPr>
-          <p:cNvPr id="46" name="Text 44"/>
-          <p:cNvSpPr/>
-          <p:nvPr/>
-        </p:nvSpPr>
-        <p:spPr>
-          <a:xfrm>
-            <a:off x="566928" y="3913632"/>
-            <a:ext cx="2490140" cy="420624"/>
-          </a:xfrm>
-          <a:prstGeom prst="rect">
-            <a:avLst/>
-          </a:prstGeom>
-          <a:noFill/>
-          <a:ln/>
-        </p:spPr>
-        <p:txBody>
-          <a:bodyPr wrap="square" lIns="0" tIns="0" rIns="0" bIns="0" rtlCol="0" anchor="ctr"/>
-          <a:lstStyle/>
-          <a:p>
-            <a:pPr algn="ctr" indent="0" marL="0">
-              <a:buNone/>
-            </a:pPr>
-            <a:r>
-              <a:rPr lang="en-US" sz="1150" b="1" dirty="0">
-                <a:solidFill>
-                  <a:srgbClr val="FFFFFF"/>
-                </a:solidFill>
-                <a:latin typeface="맑은 고딕" pitchFamily="34" charset="0"/>
-                <a:ea typeface="맑은 고딕" pitchFamily="34" charset="-122"/>
-                <a:cs typeface="맑은 고딕" pitchFamily="34" charset="-120"/>
-              </a:rPr>
-              <a:t>사전 권위 run</a:t>
-            </a:r>
-            <a:endParaRPr lang="en-US" sz="1150" dirty="0"/>
-          </a:p>
-        </p:txBody>
-      </p:sp>
-      <p:sp>
-        <p:nvSpPr>
-          <p:cNvPr id="47" name="Shape 45"/>
-          <p:cNvSpPr/>
-          <p:nvPr/>
-        </p:nvSpPr>
-        <p:spPr>
-          <a:xfrm>
-            <a:off x="3093644" y="4123944"/>
-            <a:ext cx="201168" cy="0"/>
-          </a:xfrm>
-          <a:prstGeom prst="line">
-            <a:avLst/>
-          </a:prstGeom>
-          <a:noFill/>
-          <a:ln w="15875">
-            <a:solidFill>
-              <a:srgbClr val="7A8A93"/>
-            </a:solidFill>
-            <a:prstDash val="solid"/>
-            <a:tailEnd type="triangle"/>
-          </a:ln>
-        </p:spPr>
-      </p:sp>
-      <p:sp>
-        <p:nvSpPr>
-          <p:cNvPr id="48" name="Shape 46"/>
-          <p:cNvSpPr/>
-          <p:nvPr/>
-        </p:nvSpPr>
-        <p:spPr>
-          <a:xfrm>
-            <a:off x="3331388" y="3913632"/>
-            <a:ext cx="2490140" cy="420624"/>
-          </a:xfrm>
-          <a:prstGeom prst="roundRect">
-            <a:avLst>
-              <a:gd name="adj" fmla="val 17391"/>
-            </a:avLst>
-          </a:prstGeom>
-          <a:solidFill>
-            <a:srgbClr val="222E35"/>
-          </a:solidFill>
-          <a:ln/>
-        </p:spPr>
-      </p:sp>
-      <p:sp>
-        <p:nvSpPr>
-          <p:cNvPr id="49" name="Text 47"/>
-          <p:cNvSpPr/>
-          <p:nvPr/>
-        </p:nvSpPr>
-        <p:spPr>
-          <a:xfrm>
-            <a:off x="3331388" y="3913632"/>
-            <a:ext cx="2490140" cy="420624"/>
-          </a:xfrm>
-          <a:prstGeom prst="rect">
-            <a:avLst/>
-          </a:prstGeom>
-          <a:noFill/>
-          <a:ln/>
-        </p:spPr>
-        <p:txBody>
-          <a:bodyPr wrap="square" lIns="0" tIns="0" rIns="0" bIns="0" rtlCol="0" anchor="ctr"/>
-          <a:lstStyle/>
-          <a:p>
-            <a:pPr algn="ctr" indent="0" marL="0">
-              <a:buNone/>
-            </a:pPr>
-            <a:r>
-              <a:rPr lang="en-US" sz="1150" b="1" dirty="0">
-                <a:solidFill>
-                  <a:srgbClr val="FFFFFF"/>
-                </a:solidFill>
-                <a:latin typeface="맑은 고딕" pitchFamily="34" charset="0"/>
-                <a:ea typeface="맑은 고딕" pitchFamily="34" charset="-122"/>
-                <a:cs typeface="맑은 고딕" pitchFamily="34" charset="-120"/>
-              </a:rPr>
-              <a:t>장애 주입</a:t>
-            </a:r>
-            <a:endParaRPr lang="en-US" sz="1150" dirty="0"/>
-          </a:p>
-        </p:txBody>
-      </p:sp>
-      <p:sp>
-        <p:nvSpPr>
-          <p:cNvPr id="50" name="Shape 48"/>
-          <p:cNvSpPr/>
-          <p:nvPr/>
-        </p:nvSpPr>
-        <p:spPr>
-          <a:xfrm>
-            <a:off x="5858104" y="4123944"/>
-            <a:ext cx="201168" cy="0"/>
-          </a:xfrm>
-          <a:prstGeom prst="line">
-            <a:avLst/>
-          </a:prstGeom>
-          <a:noFill/>
-          <a:ln w="15875">
-            <a:solidFill>
-              <a:srgbClr val="7A8A93"/>
-            </a:solidFill>
-            <a:prstDash val="solid"/>
-            <a:tailEnd type="triangle"/>
-          </a:ln>
-        </p:spPr>
-      </p:sp>
-      <p:sp>
-        <p:nvSpPr>
-          <p:cNvPr id="51" name="Shape 49"/>
-          <p:cNvSpPr/>
-          <p:nvPr/>
-        </p:nvSpPr>
-        <p:spPr>
-          <a:xfrm>
-            <a:off x="6095848" y="3913632"/>
-            <a:ext cx="2490140" cy="420624"/>
-          </a:xfrm>
-          <a:prstGeom prst="roundRect">
-            <a:avLst>
-              <a:gd name="adj" fmla="val 17391"/>
-            </a:avLst>
-          </a:prstGeom>
-          <a:solidFill>
-            <a:srgbClr val="222E35"/>
-          </a:solidFill>
-          <a:ln/>
-        </p:spPr>
-      </p:sp>
-      <p:sp>
-        <p:nvSpPr>
-          <p:cNvPr id="52" name="Text 50"/>
-          <p:cNvSpPr/>
-          <p:nvPr/>
-        </p:nvSpPr>
-        <p:spPr>
-          <a:xfrm>
-            <a:off x="6095848" y="3913632"/>
-            <a:ext cx="2490140" cy="420624"/>
-          </a:xfrm>
-          <a:prstGeom prst="rect">
-            <a:avLst/>
-          </a:prstGeom>
-          <a:noFill/>
-          <a:ln/>
-        </p:spPr>
-        <p:txBody>
-          <a:bodyPr wrap="square" lIns="0" tIns="0" rIns="0" bIns="0" rtlCol="0" anchor="ctr"/>
-          <a:lstStyle/>
-          <a:p>
-            <a:pPr algn="ctr" indent="0" marL="0">
-              <a:buNone/>
-            </a:pPr>
-            <a:r>
-              <a:rPr lang="en-US" sz="1150" b="1" dirty="0">
-                <a:solidFill>
-                  <a:srgbClr val="FFFFFF"/>
-                </a:solidFill>
-                <a:latin typeface="맑은 고딕" pitchFamily="34" charset="0"/>
-                <a:ea typeface="맑은 고딕" pitchFamily="34" charset="-122"/>
-                <a:cs typeface="맑은 고딕" pitchFamily="34" charset="-120"/>
-              </a:rPr>
-              <a:t>무개입 관찰</a:t>
-            </a:r>
-            <a:endParaRPr lang="en-US" sz="1150" dirty="0"/>
-          </a:p>
-        </p:txBody>
-      </p:sp>
-      <p:sp>
-        <p:nvSpPr>
-          <p:cNvPr id="53" name="Shape 51"/>
-          <p:cNvSpPr/>
-          <p:nvPr/>
-        </p:nvSpPr>
-        <p:spPr>
-          <a:xfrm>
-            <a:off x="8622563" y="4123944"/>
-            <a:ext cx="201168" cy="0"/>
-          </a:xfrm>
-          <a:prstGeom prst="line">
-            <a:avLst/>
-          </a:prstGeom>
-          <a:noFill/>
-          <a:ln w="15875">
-            <a:solidFill>
-              <a:srgbClr val="7A8A93"/>
-            </a:solidFill>
-            <a:prstDash val="solid"/>
-            <a:tailEnd type="triangle"/>
-          </a:ln>
-        </p:spPr>
-      </p:sp>
-      <p:sp>
-        <p:nvSpPr>
-          <p:cNvPr id="54" name="Shape 52"/>
-          <p:cNvSpPr/>
-          <p:nvPr/>
-        </p:nvSpPr>
-        <p:spPr>
-          <a:xfrm>
-            <a:off x="8860307" y="3913632"/>
-            <a:ext cx="2490140" cy="420624"/>
-          </a:xfrm>
-          <a:prstGeom prst="roundRect">
-            <a:avLst>
-              <a:gd name="adj" fmla="val 17391"/>
-            </a:avLst>
-          </a:prstGeom>
-          <a:solidFill>
-            <a:srgbClr val="222E35"/>
-          </a:solidFill>
-          <a:ln/>
-        </p:spPr>
-      </p:sp>
-      <p:sp>
-        <p:nvSpPr>
-          <p:cNvPr id="55" name="Text 53"/>
-          <p:cNvSpPr/>
-          <p:nvPr/>
-        </p:nvSpPr>
-        <p:spPr>
-          <a:xfrm>
-            <a:off x="8860307" y="3913632"/>
-            <a:ext cx="2490140" cy="420624"/>
-          </a:xfrm>
-          <a:prstGeom prst="rect">
-            <a:avLst/>
-          </a:prstGeom>
-          <a:noFill/>
-          <a:ln/>
-        </p:spPr>
-        <p:txBody>
-          <a:bodyPr wrap="square" lIns="0" tIns="0" rIns="0" bIns="0" rtlCol="0" anchor="ctr"/>
-          <a:lstStyle/>
-          <a:p>
-            <a:pPr algn="ctr" indent="0" marL="0">
-              <a:buNone/>
-            </a:pPr>
-            <a:r>
-              <a:rPr lang="en-US" sz="1150" b="1" dirty="0">
-                <a:solidFill>
-                  <a:srgbClr val="FFFFFF"/>
-                </a:solidFill>
-                <a:latin typeface="맑은 고딕" pitchFamily="34" charset="0"/>
-                <a:ea typeface="맑은 고딕" pitchFamily="34" charset="-122"/>
-                <a:cs typeface="맑은 고딕" pitchFamily="34" charset="-120"/>
-              </a:rPr>
-              <a:t>사후 권위 run</a:t>
-            </a:r>
-            <a:endParaRPr lang="en-US" sz="1150" dirty="0"/>
-          </a:p>
-        </p:txBody>
-      </p:sp>
-      <p:sp>
-        <p:nvSpPr>
-          <p:cNvPr id="56" name="Text 54"/>
-          <p:cNvSpPr/>
-          <p:nvPr/>
-        </p:nvSpPr>
-        <p:spPr>
-          <a:xfrm>
-            <a:off x="566928" y="4773168"/>
-            <a:ext cx="11057839" cy="1344168"/>
+            <a:off x="566928" y="4956048"/>
+            <a:ext cx="11057839" cy="832104"/>
           </a:xfrm>
           <a:prstGeom prst="rect">
             <a:avLst/>
@@ -10384,7 +10835,7 @@
               <a:buChar char="–"/>
             </a:pPr>
             <a:r>
-              <a:rPr lang="en-US" sz="1300" dirty="0">
+              <a:rPr lang="en-US" sz="1250" dirty="0">
                 <a:solidFill>
                   <a:srgbClr val="3C4A52"/>
                 </a:solidFill>
@@ -10392,9 +10843,9 @@
                 <a:ea typeface="맑은 고딕" pitchFamily="34" charset="-122"/>
                 <a:cs typeface="맑은 고딕" pitchFamily="34" charset="-120"/>
               </a:rPr>
-              <a:t>라이브 PASS 5건. E5·E7은 C01~C23 전건 0위반</a:t>
+              <a:t>라이브 PASS 6건. E5·E7은 불변식 C01~C23 전건 0위반이었다</a:t>
             </a:r>
-            <a:endParaRPr lang="en-US" sz="1300" dirty="0"/>
+            <a:endParaRPr lang="en-US" sz="1250" dirty="0"/>
           </a:p>
           <a:p>
             <a:pPr marL="342900" indent="-342900">
@@ -10408,7 +10859,7 @@
               <a:buChar char="–"/>
             </a:pPr>
             <a:r>
-              <a:rPr lang="en-US" sz="1300" dirty="0">
+              <a:rPr lang="en-US" sz="1250" dirty="0">
                 <a:solidFill>
                   <a:srgbClr val="3C4A52"/>
                 </a:solidFill>
@@ -10416,57 +10867,9 @@
                 <a:ea typeface="맑은 고딕" pitchFamily="34" charset="-122"/>
                 <a:cs typeface="맑은 고딕" pitchFamily="34" charset="-120"/>
               </a:rPr>
-              <a:t>E10 tc netem 커널 주입을 신규 추가한다</a:t>
+              <a:t>E1~E9는 전부 프록시 모사다. 커널에 직접 넣는 것은 E10이 처음이다</a:t>
             </a:r>
-            <a:endParaRPr lang="en-US" sz="1300" dirty="0"/>
-          </a:p>
-          <a:p>
-            <a:pPr marL="342900" indent="-342900">
-              <a:lnSpc>
-                <a:spcPts val="2000"/>
-              </a:lnSpc>
-              <a:spcAft>
-                <a:spcPts val="500"/>
-              </a:spcAft>
-              <a:buSzPct val="100000"/>
-              <a:buChar char="–"/>
-            </a:pPr>
-            <a:r>
-              <a:rPr lang="en-US" sz="1300" dirty="0">
-                <a:solidFill>
-                  <a:srgbClr val="3C4A52"/>
-                </a:solidFill>
-                <a:latin typeface="맑은 고딕" pitchFamily="34" charset="0"/>
-                <a:ea typeface="맑은 고딕" pitchFamily="34" charset="-122"/>
-                <a:cs typeface="맑은 고딕" pitchFamily="34" charset="-120"/>
-              </a:rPr>
-              <a:t>k6 시나리오 4종은 실재하나 실행 배선 0건이라 이번에 닫는다</a:t>
-            </a:r>
-            <a:endParaRPr lang="en-US" sz="1300" dirty="0"/>
-          </a:p>
-          <a:p>
-            <a:pPr marL="342900" indent="-342900">
-              <a:lnSpc>
-                <a:spcPts val="2000"/>
-              </a:lnSpc>
-              <a:spcAft>
-                <a:spcPts val="500"/>
-              </a:spcAft>
-              <a:buSzPct val="100000"/>
-              <a:buChar char="–"/>
-            </a:pPr>
-            <a:r>
-              <a:rPr lang="en-US" sz="1300" dirty="0">
-                <a:solidFill>
-                  <a:srgbClr val="3C4A52"/>
-                </a:solidFill>
-                <a:latin typeface="맑은 고딕" pitchFamily="34" charset="0"/>
-                <a:ea typeface="맑은 고딕" pitchFamily="34" charset="-122"/>
-                <a:cs typeface="맑은 고딕" pitchFamily="34" charset="-120"/>
-              </a:rPr>
-              <a:t>실험 산출물을 파일로 보존해 증거 휘발을 막는다</a:t>
-            </a:r>
-            <a:endParaRPr lang="en-US" sz="1300" dirty="0"/>
+            <a:endParaRPr lang="en-US" sz="1250" dirty="0"/>
           </a:p>
         </p:txBody>
       </p:sp>
@@ -12152,7 +12555,7 @@
                 <a:ea typeface="맑은 고딕" pitchFamily="34" charset="-122"/>
                 <a:cs typeface="맑은 고딕" pitchFamily="34" charset="-120"/>
               </a:rPr>
-              <a:t>336h</a:t>
+              <a:t>303h</a:t>
             </a:r>
             <a:endParaRPr lang="en-US" sz="1800" dirty="0"/>
           </a:p>

--- a/제출_20260901/기획안_요약.pptx
+++ b/제출_20260901/기획안_요약.pptx
@@ -5816,8 +5816,8 @@
         </p:blipFill>
         <p:spPr>
           <a:xfrm>
-            <a:off x="310896" y="1426464"/>
-            <a:ext cx="11576304" cy="5166360"/>
+            <a:off x="2020824" y="1426464"/>
+            <a:ext cx="8156448" cy="5166360"/>
           </a:xfrm>
           <a:prstGeom prst="rect">
             <a:avLst/>

--- a/제출_20260901/기획안_요약.pptx
+++ b/제출_20260901/기획안_요약.pptx
@@ -5645,7 +5645,7 @@
                 <a:ea typeface="맑은 고딕" pitchFamily="34" charset="-122"/>
                 <a:cs typeface="맑은 고딕" pitchFamily="34" charset="-120"/>
               </a:rPr>
-              <a:t>불변식 26개 상시 검증 · 판정기 자체를 검증하는 반증 테스트 8건</a:t>
+              <a:t>불변식 27개 상시 검증 · 판정기 자체를 검증하는 반증 테스트 8건</a:t>
             </a:r>
             <a:endParaRPr lang="en-US" sz="1100" dirty="0"/>
           </a:p>
@@ -6961,7 +6961,7 @@
                 <a:ea typeface="맑은 고딕" pitchFamily="34" charset="-122"/>
                 <a:cs typeface="맑은 고딕" pitchFamily="34" charset="-120"/>
               </a:rPr>
-              <a:t>Grafana 대시보드 4종</a:t>
+              <a:t>Grafana 대시보드 9종</a:t>
             </a:r>
             <a:endParaRPr lang="en-US" sz="1100" dirty="0"/>
           </a:p>
@@ -6985,7 +6985,7 @@
                 <a:ea typeface="맑은 고딕" pitchFamily="34" charset="-122"/>
                 <a:cs typeface="맑은 고딕" pitchFamily="34" charset="-120"/>
               </a:rPr>
-              <a:t>레코딩 룰 9 · 알람 11</a:t>
+              <a:t>레코딩 룰 9 · 알람 15</a:t>
             </a:r>
             <a:endParaRPr lang="en-US" sz="1100" dirty="0"/>
           </a:p>

--- a/제출_20260901/기획안_요약.pptx
+++ b/제출_20260901/기획안_요약.pptx
@@ -685,7 +685,7 @@
           <a:p>
             <a:r>
               <a:rPr lang="en-US" dirty="0"/>
-              <a:t>명제는 반증 조건을 함께 적을 때만 명제입니다. 판정은 SQL 위반 행 수, 메트릭 임계, 스크립트 종료 코드 세 가지로만 합니다. 데모 화면이 잘 도는 것은 증거로 치지 않습니다. E4는 판정 술어가 교체된 뒤 재측정하지 않아 보류로 적었습니다. 미확인을 미확인이라고 적는 것이 이 문서의 규율입니다.</a:t>
+              <a:t>명제는 반증 조건을 함께 적을 때만 명제입니다. 판정은 SQL 위반 행 수, 메트릭 임계, 스크립트 종료 코드 세 가지로만 합니다. 데모 화면이 잘 도는 것은 증거로 치지 않습니다. 표의 RTO 는 2026-09-13 에 같은 코드 위에서 다시 잰 값이고 전부 로컬 카오스 스택입니다. 클라우드 실측은 아직 0건입니다. 미확인을 미확인이라고 적는 것이 이 문서의 규율입니다.</a:t>
             </a:r>
             <a:endParaRPr lang="en-US" dirty="0"/>
           </a:p>
@@ -1037,7 +1037,7 @@
           <a:p>
             <a:r>
               <a:rPr lang="en-US" dirty="0"/>
-              <a:t>실험 열 종입니다. 왼쪽이 무엇을 확인하는 실험인지, 오른쪽이 실제로 나온 결과입니다. 라이브 통과가 여섯 건이고 그중 E5와 E7은 불변식 스물세 개가 전건 0위반이었습니다. 복구됐다는 사실과 데이터가 맞다는 사실을 같은 실행 안에서 함께 판정했다는 뜻입니다. 빨간 두 줄이 남은 일입니다. E4는 리더 킬인데 측정 기준이 8월 18일에 바뀐 뒤 재측정을 안 했습니다. 옛 숫자를 그대로 쓰면 거짓이 되므로 이 계획서에 수치로 적지 않았습니다. E10은 지금까지와 층위가 다릅니다. E1부터 E9까지는 전부 프록시가 느린 척 끊긴 척한 모사이고, tc netem 은 리눅스 커널 큐에 직접 지연과 손실을 넣습니다. 그게 실제 네트워크 장애와 같은 층위입니다.</a:t>
+              <a:t>실험 열 종입니다. 왼쪽이 무엇을 확인하는 실험인지, 오른쪽이 실제로 나온 결과입니다. 라이브 통과가 여섯 건이고 그중 E5와 E7은 불변식 스물세 개가 전건 0위반이었습니다. 복구됐다는 사실과 데이터가 맞다는 사실을 같은 실행 안에서 함께 판정했다는 뜻입니다. E4 리더 킬은 9월 13일에 같은 코드 위에서 다시 재서 6.518초로 통과했습니다. 빨간 줄 하나가 남은 일입니다. E10은 지금까지와 층위가 다릅니다. E1부터 E9까지는 전부 프록시가 느린 척 끊긴 척한 모사이고, tc netem 은 리눅스 커널 큐에 직접 지연과 손실을 넣습니다. 그게 실제 네트워크 장애와 같은 층위입니다.</a:t>
             </a:r>
             <a:endParaRPr lang="en-US" dirty="0"/>
           </a:p>
@@ -4903,7 +4903,7 @@
                           <a:ea typeface="맑은 고딕" pitchFamily="34" charset="-122"/>
                           <a:cs typeface="맑은 고딕" pitchFamily="34" charset="-120"/>
                         </a:rPr>
-                        <a:t>13.882초 (재실행 14.367초)</a:t>
+                        <a:t>5.116초</a:t>
                       </a:r>
                       <a:endParaRPr lang="en-US" sz="1100" dirty="0">
                         <a:latin typeface="맑은 고딕" charset="0"/>
@@ -5100,7 +5100,7 @@
                           <a:ea typeface="맑은 고딕" pitchFamily="34" charset="-122"/>
                           <a:cs typeface="맑은 고딕" pitchFamily="34" charset="-120"/>
                         </a:rPr>
-                        <a:t>11.99초</a:t>
+                        <a:t>10.041초</a:t>
                       </a:r>
                       <a:endParaRPr lang="en-US" sz="1100" dirty="0">
                         <a:latin typeface="맑은 고딕" charset="0"/>
@@ -5297,7 +5297,7 @@
                           <a:ea typeface="맑은 고딕" pitchFamily="34" charset="-122"/>
                           <a:cs typeface="맑은 고딕" pitchFamily="34" charset="-120"/>
                         </a:rPr>
-                        <a:t>9.983초</a:t>
+                        <a:t>10.226초</a:t>
                       </a:r>
                       <a:endParaRPr lang="en-US" sz="1100" dirty="0">
                         <a:latin typeface="맑은 고딕" charset="0"/>
@@ -5494,7 +5494,7 @@
                           <a:ea typeface="맑은 고딕" pitchFamily="34" charset="-122"/>
                           <a:cs typeface="맑은 고딕" pitchFamily="34" charset="-120"/>
                         </a:rPr>
-                        <a:t>미확인. 술어 교체 후 재측정</a:t>
+                        <a:t>6.518초</a:t>
                       </a:r>
                       <a:endParaRPr lang="en-US" sz="1100" dirty="0">
                         <a:latin typeface="맑은 고딕" charset="0"/>
@@ -5559,7 +5559,7 @@
                           <a:ea typeface="맑은 고딕" pitchFamily="34" charset="-122"/>
                           <a:cs typeface="맑은 고딕" pitchFamily="34" charset="-120"/>
                         </a:rPr>
-                        <a:t>보류</a:t>
+                        <a:t>PASS</a:t>
                       </a:r>
                       <a:endParaRPr lang="en-US" sz="1100" dirty="0">
                         <a:latin typeface="맑은 고딕" charset="0"/>
@@ -8977,7 +8977,7 @@
                           <a:ea typeface="맑은 고딕" pitchFamily="34" charset="-122"/>
                           <a:cs typeface="맑은 고딕" pitchFamily="34" charset="-120"/>
                         </a:rPr>
-                        <a:t>PASS · 2.06초 만에 복구</a:t>
+                        <a:t>PASS · 3회 연속, 약 2초 만에 복구</a:t>
                       </a:r>
                       <a:endParaRPr lang="en-US" sz="1000" dirty="0">
                         <a:latin typeface="맑은 고딕" charset="0"/>
@@ -9174,7 +9174,7 @@
                           <a:ea typeface="맑은 고딕" pitchFamily="34" charset="-122"/>
                           <a:cs typeface="맑은 고딕" pitchFamily="34" charset="-120"/>
                         </a:rPr>
-                        <a:t>PASS · 약 13.9초 만에 복구</a:t>
+                        <a:t>PASS · 약 5.1초 만에 복구</a:t>
                       </a:r>
                       <a:endParaRPr lang="en-US" sz="1000" dirty="0">
                         <a:latin typeface="맑은 고딕" charset="0"/>
@@ -9562,13 +9562,13 @@
                       <a:r>
                         <a:rPr lang="en-US" sz="1000" b="1" dirty="0">
                           <a:solidFill>
-                            <a:srgbClr val="B33A32"/>
+                            <a:srgbClr val="2F6B54"/>
                           </a:solidFill>
                           <a:latin typeface="맑은 고딕" pitchFamily="34" charset="0"/>
                           <a:ea typeface="맑은 고딕" pitchFamily="34" charset="-122"/>
                           <a:cs typeface="맑은 고딕" pitchFamily="34" charset="-120"/>
                         </a:rPr>
-                        <a:t>미확인 · 기준 변경 후 재시험 필요</a:t>
+                        <a:t>PASS · 약 6.5초 만에 복구</a:t>
                       </a:r>
                       <a:endParaRPr lang="en-US" sz="1000" dirty="0">
                         <a:latin typeface="맑은 고딕" charset="0"/>
@@ -9765,7 +9765,7 @@
                           <a:ea typeface="맑은 고딕" pitchFamily="34" charset="-122"/>
                           <a:cs typeface="맑은 고딕" pitchFamily="34" charset="-120"/>
                         </a:rPr>
-                        <a:t>PASS · 약 12초 만에 복구, 오류 0건</a:t>
+                        <a:t>PASS · 약 10.0초 만에 복구, 오류 0건</a:t>
                       </a:r>
                       <a:endParaRPr lang="en-US" sz="1000" dirty="0">
                         <a:latin typeface="맑은 고딕" charset="0"/>
@@ -9962,7 +9962,7 @@
                           <a:ea typeface="맑은 고딕" pitchFamily="34" charset="-122"/>
                           <a:cs typeface="맑은 고딕" pitchFamily="34" charset="-120"/>
                         </a:rPr>
-                        <a:t>PASS · 0.107초 만에 복구</a:t>
+                        <a:t>PASS · 약 7.3초 만에 복구</a:t>
                       </a:r>
                       <a:endParaRPr lang="en-US" sz="1000" dirty="0">
                         <a:latin typeface="맑은 고딕" charset="0"/>
@@ -10159,7 +10159,7 @@
                           <a:ea typeface="맑은 고딕" pitchFamily="34" charset="-122"/>
                           <a:cs typeface="맑은 고딕" pitchFamily="34" charset="-120"/>
                         </a:rPr>
-                        <a:t>PASS · 약 10초 만에 복구, 오류 0건</a:t>
+                        <a:t>PASS · 약 10.2초 만에 복구, 오류 0건</a:t>
                       </a:r>
                       <a:endParaRPr lang="en-US" sz="1000" dirty="0">
                         <a:latin typeface="맑은 고딕" charset="0"/>
